--- a/outputs/produkte/mama-ceo/03-praesentationen/saeule-3/01-lektion-3-1.pptx
+++ b/outputs/produkte/mama-ceo/03-praesentationen/saeule-3/01-lektion-3-1.pptx
@@ -14,7 +14,7 @@
     <p:sldId id="262" r:id="rId14"/>
     <p:sldId id="263" r:id="rId15"/>
   </p:sldIdLst>
-  <p:sldSz cx="12191695" cy="6858000" type="screen4x3"/>
+  <p:sldSz cx="9144000" cy="5143500" type="screen4x3"/>
   <p:notesSz cx="6858000" cy="9144000"/>
   <p:defaultTextStyle>
     <a:defPPr>
@@ -4001,7 +4001,7 @@
     <p:bg>
       <p:bgPr>
         <a:solidFill>
-          <a:srgbClr val="1F6F6B"/>
+          <a:srgbClr val="F1ECDD"/>
         </a:solidFill>
         <a:effectLst/>
       </p:bgPr>
@@ -4015,14 +4015,58 @@
       <p:grpSpPr/>
       <p:sp>
         <p:nvSpPr>
-          <p:cNvPr id="2" name="TextBox 1"/>
+          <p:cNvPr id="2" name="Oval 1"/>
+          <p:cNvSpPr/>
+          <p:nvPr/>
+        </p:nvSpPr>
+        <p:spPr>
+          <a:xfrm>
+            <a:off x="6858000" y="3840480"/>
+            <a:ext cx="3200400" cy="3200400"/>
+          </a:xfrm>
+          <a:prstGeom prst="ellipse">
+            <a:avLst/>
+          </a:prstGeom>
+          <a:solidFill>
+            <a:srgbClr val="DC822E"/>
+          </a:solidFill>
+          <a:ln>
+            <a:noFill/>
+          </a:ln>
+          <a:effectLst/>
+        </p:spPr>
+        <p:style>
+          <a:lnRef idx="1">
+            <a:schemeClr val="accent1"/>
+          </a:lnRef>
+          <a:fillRef idx="3">
+            <a:schemeClr val="accent1"/>
+          </a:fillRef>
+          <a:effectRef idx="2">
+            <a:schemeClr val="accent1"/>
+          </a:effectRef>
+          <a:fontRef idx="minor">
+            <a:schemeClr val="lt1"/>
+          </a:fontRef>
+        </p:style>
+        <p:txBody>
+          <a:bodyPr rtlCol="0" anchor="ctr"/>
+          <a:lstStyle/>
+          <a:p>
+            <a:pPr algn="ctr"/>
+          </a:p>
+        </p:txBody>
+      </p:sp>
+      <p:sp>
+        <p:nvSpPr>
+          <p:cNvPr id="3" name="TextBox 2"/>
           <p:cNvSpPr txBox="1"/>
           <p:nvPr/>
         </p:nvSpPr>
         <p:spPr>
           <a:xfrm>
-            <a:off x="914400" y="1920240"/>
-            <a:ext cx="10332720" cy="914400"/>
+            <a:off x="548640" y="548640"/>
+            <a:ext cx="8046720" cy="365760"/>
           </a:xfrm>
           <a:prstGeom prst="rect">
             <a:avLst/>
@@ -4035,36 +4079,72 @@
           </a:bodyPr>
           <a:lstStyle/>
           <a:p>
-            <a:pPr algn="l">
-              <a:spcBef>
-                <a:spcPts val="0"/>
-              </a:spcBef>
-              <a:spcAft>
-                <a:spcPts val="1000"/>
-              </a:spcAft>
-            </a:pPr>
-            <a:r>
-              <a:rPr sz="8000" b="1" i="0">
-                <a:solidFill>
-                  <a:srgbClr val="F1ECDD"/>
-                </a:solidFill>
-                <a:latin typeface="Georgia"/>
-              </a:rPr>
-              <a:t>3.1</a:t>
-            </a:r>
-          </a:p>
-        </p:txBody>
-      </p:sp>
-      <p:sp>
-        <p:nvSpPr>
-          <p:cNvPr id="3" name="TextBox 2"/>
+            <a:r>
+              <a:rPr sz="1100" b="1" i="0">
+                <a:solidFill>
+                  <a:srgbClr val="DC822E"/>
+                </a:solidFill>
+                <a:latin typeface="Calibri"/>
+              </a:rPr>
+              <a:t>SÄULE 3 — DU BAUST DIE STRUKTUR</a:t>
+            </a:r>
+          </a:p>
+        </p:txBody>
+      </p:sp>
+      <p:sp>
+        <p:nvSpPr>
+          <p:cNvPr id="4" name="Rectangle 3"/>
+          <p:cNvSpPr/>
+          <p:nvPr/>
+        </p:nvSpPr>
+        <p:spPr>
+          <a:xfrm>
+            <a:off x="548640" y="960120"/>
+            <a:ext cx="548640" cy="45720"/>
+          </a:xfrm>
+          <a:prstGeom prst="rect">
+            <a:avLst/>
+          </a:prstGeom>
+          <a:solidFill>
+            <a:srgbClr val="DC822E"/>
+          </a:solidFill>
+          <a:ln>
+            <a:noFill/>
+          </a:ln>
+          <a:effectLst/>
+        </p:spPr>
+        <p:style>
+          <a:lnRef idx="1">
+            <a:schemeClr val="accent1"/>
+          </a:lnRef>
+          <a:fillRef idx="3">
+            <a:schemeClr val="accent1"/>
+          </a:fillRef>
+          <a:effectRef idx="2">
+            <a:schemeClr val="accent1"/>
+          </a:effectRef>
+          <a:fontRef idx="minor">
+            <a:schemeClr val="lt1"/>
+          </a:fontRef>
+        </p:style>
+        <p:txBody>
+          <a:bodyPr rtlCol="0" anchor="ctr"/>
+          <a:lstStyle/>
+          <a:p>
+            <a:pPr algn="ctr"/>
+          </a:p>
+        </p:txBody>
+      </p:sp>
+      <p:sp>
+        <p:nvSpPr>
+          <p:cNvPr id="5" name="TextBox 4"/>
           <p:cNvSpPr txBox="1"/>
           <p:nvPr/>
         </p:nvSpPr>
         <p:spPr>
           <a:xfrm>
-            <a:off x="914400" y="2971800"/>
-            <a:ext cx="10332720" cy="1828800"/>
+            <a:off x="548640" y="1234440"/>
+            <a:ext cx="7863840" cy="1463040"/>
           </a:xfrm>
           <a:prstGeom prst="rect">
             <a:avLst/>
@@ -4077,18 +4157,10 @@
           </a:bodyPr>
           <a:lstStyle/>
           <a:p>
-            <a:pPr algn="l">
-              <a:spcBef>
-                <a:spcPts val="0"/>
-              </a:spcBef>
-              <a:spcAft>
-                <a:spcPts val="1000"/>
-              </a:spcAft>
-            </a:pPr>
             <a:r>
               <a:rPr sz="4400" b="1" i="0">
                 <a:solidFill>
-                  <a:srgbClr val="FFFFFF"/>
+                  <a:srgbClr val="1A3A4A"/>
                 </a:solidFill>
                 <a:latin typeface="Georgia"/>
               </a:rPr>
@@ -4099,14 +4171,14 @@
       </p:sp>
       <p:sp>
         <p:nvSpPr>
-          <p:cNvPr id="4" name="TextBox 3"/>
+          <p:cNvPr id="6" name="TextBox 5"/>
           <p:cNvSpPr txBox="1"/>
           <p:nvPr/>
         </p:nvSpPr>
         <p:spPr>
           <a:xfrm>
-            <a:off x="914400" y="4480560"/>
-            <a:ext cx="10332720" cy="914400"/>
+            <a:off x="548640" y="2880360"/>
+            <a:ext cx="7680960" cy="1280160"/>
           </a:xfrm>
           <a:prstGeom prst="rect">
             <a:avLst/>
@@ -4119,22 +4191,83 @@
           </a:bodyPr>
           <a:lstStyle/>
           <a:p>
-            <a:pPr algn="l">
-              <a:spcBef>
-                <a:spcPts val="0"/>
-              </a:spcBef>
-              <a:spcAft>
-                <a:spcPts val="1000"/>
-              </a:spcAft>
-            </a:pPr>
-            <a:r>
-              <a:rPr sz="2400" b="0" i="1">
-                <a:solidFill>
-                  <a:srgbClr val="F1ECDD"/>
+            <a:r>
+              <a:rPr sz="1800" b="0" i="0">
+                <a:solidFill>
+                  <a:srgbClr val="2C3E50"/>
+                </a:solidFill>
+                <a:latin typeface="Georgia"/>
+              </a:rPr>
+              <a:t>Dein Chaos kriegt ein Zuhause</a:t>
+            </a:r>
+          </a:p>
+        </p:txBody>
+      </p:sp>
+      <p:sp>
+        <p:nvSpPr>
+          <p:cNvPr id="7" name="TextBox 6"/>
+          <p:cNvSpPr txBox="1"/>
+          <p:nvPr/>
+        </p:nvSpPr>
+        <p:spPr>
+          <a:xfrm>
+            <a:off x="548640" y="4572000"/>
+            <a:ext cx="3657600" cy="365760"/>
+          </a:xfrm>
+          <a:prstGeom prst="rect">
+            <a:avLst/>
+          </a:prstGeom>
+          <a:noFill/>
+        </p:spPr>
+        <p:txBody>
+          <a:bodyPr wrap="square" anchor="t" lIns="0" rIns="0" tIns="0" bIns="0">
+            <a:spAutoFit/>
+          </a:bodyPr>
+          <a:lstStyle/>
+          <a:p>
+            <a:r>
+              <a:rPr sz="1200" b="1" i="0">
+                <a:solidFill>
+                  <a:srgbClr val="12828C"/>
                 </a:solidFill>
                 <a:latin typeface="Calibri"/>
               </a:rPr>
-              <a:t>Dein Chaos kriegt ein Zuhause</a:t>
+              <a:t>Patricia Ulmann</a:t>
+            </a:r>
+          </a:p>
+        </p:txBody>
+      </p:sp>
+      <p:sp>
+        <p:nvSpPr>
+          <p:cNvPr id="8" name="TextBox 7"/>
+          <p:cNvSpPr txBox="1"/>
+          <p:nvPr/>
+        </p:nvSpPr>
+        <p:spPr>
+          <a:xfrm>
+            <a:off x="4937760" y="4572000"/>
+            <a:ext cx="3657600" cy="365760"/>
+          </a:xfrm>
+          <a:prstGeom prst="rect">
+            <a:avLst/>
+          </a:prstGeom>
+          <a:noFill/>
+        </p:spPr>
+        <p:txBody>
+          <a:bodyPr wrap="square" anchor="t" lIns="0" rIns="0" tIns="0" bIns="0">
+            <a:spAutoFit/>
+          </a:bodyPr>
+          <a:lstStyle/>
+          <a:p>
+            <a:pPr algn="r"/>
+            <a:r>
+              <a:rPr sz="1100" b="0" i="0">
+                <a:solidFill>
+                  <a:srgbClr val="7A8A95"/>
+                </a:solidFill>
+                <a:latin typeface="Calibri"/>
+              </a:rPr>
+              <a:t>mumlifebalance.ch</a:t>
             </a:r>
           </a:p>
         </p:txBody>
@@ -4167,20 +4300,309 @@
       <p:grpSpPr/>
       <p:sp>
         <p:nvSpPr>
-          <p:cNvPr id="2" name="Rectangle 1"/>
+          <p:cNvPr id="2" name="TextBox 1"/>
+          <p:cNvSpPr txBox="1"/>
+          <p:nvPr/>
+        </p:nvSpPr>
+        <p:spPr>
+          <a:xfrm>
+            <a:off x="548640" y="457200"/>
+            <a:ext cx="8046720" cy="914400"/>
+          </a:xfrm>
+          <a:prstGeom prst="rect">
+            <a:avLst/>
+          </a:prstGeom>
+          <a:noFill/>
+        </p:spPr>
+        <p:txBody>
+          <a:bodyPr wrap="square" anchor="t" lIns="0" rIns="0" tIns="0" bIns="0">
+            <a:spAutoFit/>
+          </a:bodyPr>
+          <a:lstStyle/>
+          <a:p>
+            <a:r>
+              <a:rPr sz="3000" b="1" i="0">
+                <a:solidFill>
+                  <a:srgbClr val="1A3A4A"/>
+                </a:solidFill>
+                <a:latin typeface="Georgia"/>
+              </a:rPr>
+              <a:t>Wo du gerade stehst</a:t>
+            </a:r>
+          </a:p>
+        </p:txBody>
+      </p:sp>
+      <p:sp>
+        <p:nvSpPr>
+          <p:cNvPr id="3" name="TextBox 2"/>
+          <p:cNvSpPr txBox="1"/>
+          <p:nvPr/>
+        </p:nvSpPr>
+        <p:spPr>
+          <a:xfrm>
+            <a:off x="548640" y="1417320"/>
+            <a:ext cx="8046720" cy="3154680"/>
+          </a:xfrm>
+          <a:prstGeom prst="rect">
+            <a:avLst/>
+          </a:prstGeom>
+          <a:noFill/>
+        </p:spPr>
+        <p:txBody>
+          <a:bodyPr wrap="square" anchor="t" lIns="0" rIns="0" tIns="0" bIns="0">
+            <a:spAutoFit/>
+          </a:bodyPr>
+          <a:lstStyle/>
+          <a:p>
+            <a:pPr>
+              <a:spcBef>
+                <a:spcPts val="0"/>
+              </a:spcBef>
+              <a:spcAft>
+                <a:spcPts val="900"/>
+              </a:spcAft>
+            </a:pPr>
+            <a:r>
+              <a:rPr sz="1600" b="1" i="0">
+                <a:solidFill>
+                  <a:srgbClr val="12828C"/>
+                </a:solidFill>
+                <a:latin typeface="Calibri"/>
+              </a:rPr>
+              <a:t>✓  </a:t>
+            </a:r>
+            <a:r>
+              <a:rPr sz="1600" b="0" i="0">
+                <a:solidFill>
+                  <a:srgbClr val="2C3E50"/>
+                </a:solidFill>
+                <a:latin typeface="Calibri"/>
+              </a:rPr>
+              <a:t>Dein Wochenrhythmus mit den 4 Rollen (Säule 1)</a:t>
+            </a:r>
+          </a:p>
+          <a:p>
+            <a:pPr>
+              <a:spcBef>
+                <a:spcPts val="0"/>
+              </a:spcBef>
+              <a:spcAft>
+                <a:spcPts val="900"/>
+              </a:spcAft>
+            </a:pPr>
+            <a:r>
+              <a:rPr sz="1600" b="1" i="0">
+                <a:solidFill>
+                  <a:srgbClr val="12828C"/>
+                </a:solidFill>
+                <a:latin typeface="Calibri"/>
+              </a:rPr>
+              <a:t>✓  </a:t>
+            </a:r>
+            <a:r>
+              <a:rPr sz="1600" b="0" i="0">
+                <a:solidFill>
+                  <a:srgbClr val="2C3E50"/>
+                </a:solidFill>
+                <a:latin typeface="Calibri"/>
+              </a:rPr>
+              <a:t>Dein Hütchen-Inventar mit den 7 Rollen (Säule 2)</a:t>
+            </a:r>
+          </a:p>
+          <a:p>
+            <a:pPr>
+              <a:spcBef>
+                <a:spcPts val="0"/>
+              </a:spcBef>
+              <a:spcAft>
+                <a:spcPts val="900"/>
+              </a:spcAft>
+            </a:pPr>
+            <a:r>
+              <a:rPr sz="1600" b="1" i="0">
+                <a:solidFill>
+                  <a:srgbClr val="12828C"/>
+                </a:solidFill>
+                <a:latin typeface="Calibri"/>
+              </a:rPr>
+              <a:t>✓  </a:t>
+            </a:r>
+            <a:r>
+              <a:rPr sz="1600" b="0" i="0">
+                <a:solidFill>
+                  <a:srgbClr val="2C3E50"/>
+                </a:solidFill>
+                <a:latin typeface="Calibri"/>
+              </a:rPr>
+              <a:t>Deine Aufgaben durch den 4-Filter (Säule 2)</a:t>
+            </a:r>
+          </a:p>
+          <a:p>
+            <a:pPr>
+              <a:spcBef>
+                <a:spcPts val="0"/>
+              </a:spcBef>
+              <a:spcAft>
+                <a:spcPts val="800"/>
+              </a:spcAft>
+            </a:pPr>
+            <a:r>
+              <a:rPr sz="1400" b="0" i="1">
+                <a:solidFill>
+                  <a:srgbClr val="7A8A95"/>
+                </a:solidFill>
+                <a:latin typeface="Calibri"/>
+              </a:rPr>
+              <a:t>Alles da und ehrlich erarbeitet — aber noch auf Papier verstreut.</a:t>
+            </a:r>
+          </a:p>
+        </p:txBody>
+      </p:sp>
+      <p:sp>
+        <p:nvSpPr>
+          <p:cNvPr id="4" name="TextBox 3"/>
+          <p:cNvSpPr txBox="1"/>
+          <p:nvPr/>
+        </p:nvSpPr>
+        <p:spPr>
+          <a:xfrm>
+            <a:off x="457200" y="4754880"/>
+            <a:ext cx="5486400" cy="274320"/>
+          </a:xfrm>
+          <a:prstGeom prst="rect">
+            <a:avLst/>
+          </a:prstGeom>
+          <a:noFill/>
+        </p:spPr>
+        <p:txBody>
+          <a:bodyPr wrap="square" anchor="t" lIns="0" rIns="0" tIns="0" bIns="0">
+            <a:spAutoFit/>
+          </a:bodyPr>
+          <a:lstStyle/>
+          <a:p>
+            <a:r>
+              <a:rPr sz="900" b="0" i="0">
+                <a:solidFill>
+                  <a:srgbClr val="7A8A95"/>
+                </a:solidFill>
+                <a:latin typeface="Calibri"/>
+              </a:rPr>
+              <a:t>Mama-CEO · Säule 3 · Lektion 3.1</a:t>
+            </a:r>
+          </a:p>
+        </p:txBody>
+      </p:sp>
+      <p:sp>
+        <p:nvSpPr>
+          <p:cNvPr id="5" name="TextBox 4"/>
+          <p:cNvSpPr txBox="1"/>
+          <p:nvPr/>
+        </p:nvSpPr>
+        <p:spPr>
+          <a:xfrm>
+            <a:off x="6400800" y="4754880"/>
+            <a:ext cx="2286000" cy="274320"/>
+          </a:xfrm>
+          <a:prstGeom prst="rect">
+            <a:avLst/>
+          </a:prstGeom>
+          <a:noFill/>
+        </p:spPr>
+        <p:txBody>
+          <a:bodyPr wrap="square" anchor="t" lIns="0" rIns="0" tIns="0" bIns="0">
+            <a:spAutoFit/>
+          </a:bodyPr>
+          <a:lstStyle/>
+          <a:p>
+            <a:pPr algn="r"/>
+            <a:r>
+              <a:rPr sz="900" b="0" i="0">
+                <a:solidFill>
+                  <a:srgbClr val="7A8A95"/>
+                </a:solidFill>
+                <a:latin typeface="Calibri"/>
+              </a:rPr>
+              <a:t>Mum Life Balance</a:t>
+            </a:r>
+          </a:p>
+        </p:txBody>
+      </p:sp>
+    </p:spTree>
+  </p:cSld>
+  <p:clrMapOvr>
+    <a:masterClrMapping/>
+  </p:clrMapOvr>
+</p:sld>
+</file>
+
+<file path=ppt/slides/slide3.xml><?xml version="1.0" encoding="utf-8"?>
+<p:sld xmlns:a="http://schemas.openxmlformats.org/drawingml/2006/main" xmlns:p="http://schemas.openxmlformats.org/presentationml/2006/main" xmlns:r="http://schemas.openxmlformats.org/officeDocument/2006/relationships">
+  <p:cSld>
+    <p:bg>
+      <p:bgPr>
+        <a:solidFill>
+          <a:srgbClr val="12828C"/>
+        </a:solidFill>
+        <a:effectLst/>
+      </p:bgPr>
+    </p:bg>
+    <p:spTree>
+      <p:nvGrpSpPr>
+        <p:cNvPr id="1" name=""/>
+        <p:cNvGrpSpPr/>
+        <p:nvPr/>
+      </p:nvGrpSpPr>
+      <p:grpSpPr/>
+      <p:sp>
+        <p:nvSpPr>
+          <p:cNvPr id="2" name="TextBox 1"/>
+          <p:cNvSpPr txBox="1"/>
+          <p:nvPr/>
+        </p:nvSpPr>
+        <p:spPr>
+          <a:xfrm>
+            <a:off x="548640" y="1097280"/>
+            <a:ext cx="8046720" cy="365760"/>
+          </a:xfrm>
+          <a:prstGeom prst="rect">
+            <a:avLst/>
+          </a:prstGeom>
+          <a:noFill/>
+        </p:spPr>
+        <p:txBody>
+          <a:bodyPr wrap="square" anchor="t" lIns="0" rIns="0" tIns="0" bIns="0">
+            <a:spAutoFit/>
+          </a:bodyPr>
+          <a:lstStyle/>
+          <a:p>
+            <a:r>
+              <a:rPr sz="1100" b="1" i="0">
+                <a:solidFill>
+                  <a:srgbClr val="DC822E"/>
+                </a:solidFill>
+                <a:latin typeface="Calibri"/>
+              </a:rPr>
+              <a:t>DAS PROBLEM MIT PAPIER</a:t>
+            </a:r>
+          </a:p>
+        </p:txBody>
+      </p:sp>
+      <p:sp>
+        <p:nvSpPr>
+          <p:cNvPr id="3" name="Rectangle 2"/>
           <p:cNvSpPr/>
           <p:nvPr/>
         </p:nvSpPr>
         <p:spPr>
           <a:xfrm>
-            <a:off x="548640" y="502920"/>
-            <a:ext cx="201168" cy="201168"/>
+            <a:off x="548640" y="1554480"/>
+            <a:ext cx="548640" cy="45720"/>
           </a:xfrm>
           <a:prstGeom prst="rect">
             <a:avLst/>
           </a:prstGeom>
           <a:solidFill>
-            <a:srgbClr val="1F6F6B"/>
+            <a:srgbClr val="DC822E"/>
           </a:solidFill>
           <a:ln>
             <a:noFill/>
@@ -4211,14 +4633,14 @@
       </p:sp>
       <p:sp>
         <p:nvSpPr>
-          <p:cNvPr id="3" name="TextBox 2"/>
+          <p:cNvPr id="4" name="TextBox 3"/>
           <p:cNvSpPr txBox="1"/>
           <p:nvPr/>
         </p:nvSpPr>
         <p:spPr>
           <a:xfrm>
-            <a:off x="868680" y="457200"/>
-            <a:ext cx="10424160" cy="1005840"/>
+            <a:off x="548640" y="1920240"/>
+            <a:ext cx="8046720" cy="2194560"/>
           </a:xfrm>
           <a:prstGeom prst="rect">
             <a:avLst/>
@@ -4231,36 +4653,28 @@
           </a:bodyPr>
           <a:lstStyle/>
           <a:p>
-            <a:pPr algn="l">
-              <a:spcBef>
-                <a:spcPts val="0"/>
-              </a:spcBef>
-              <a:spcAft>
-                <a:spcPts val="1000"/>
-              </a:spcAft>
-            </a:pPr>
             <a:r>
               <a:rPr sz="3200" b="1" i="0">
                 <a:solidFill>
-                  <a:srgbClr val="1F6F6B"/>
+                  <a:srgbClr val="F1ECDD"/>
                 </a:solidFill>
                 <a:latin typeface="Georgia"/>
               </a:rPr>
-              <a:t>Wo du gerade stehst</a:t>
-            </a:r>
-          </a:p>
-        </p:txBody>
-      </p:sp>
-      <p:sp>
-        <p:nvSpPr>
-          <p:cNvPr id="4" name="TextBox 3"/>
+              <a:t>Ein Brain Dump ohne Zuhause verpufft nach 3 Tagen.</a:t>
+            </a:r>
+          </a:p>
+        </p:txBody>
+      </p:sp>
+      <p:sp>
+        <p:nvSpPr>
+          <p:cNvPr id="5" name="TextBox 4"/>
           <p:cNvSpPr txBox="1"/>
           <p:nvPr/>
         </p:nvSpPr>
         <p:spPr>
           <a:xfrm>
-            <a:off x="868680" y="1783080"/>
-            <a:ext cx="10424160" cy="4572000"/>
+            <a:off x="548640" y="3703320"/>
+            <a:ext cx="8046720" cy="731520"/>
           </a:xfrm>
           <a:prstGeom prst="rect">
             <a:avLst/>
@@ -4273,163 +4687,28 @@
           </a:bodyPr>
           <a:lstStyle/>
           <a:p>
-            <a:pPr algn="l">
-              <a:spcBef>
-                <a:spcPts val="0"/>
-              </a:spcBef>
-              <a:spcAft>
-                <a:spcPts val="1400"/>
-              </a:spcAft>
-            </a:pPr>
-            <a:r>
-              <a:rPr sz="2100" b="0" i="0">
-                <a:solidFill>
-                  <a:srgbClr val="2E7D57"/>
+            <a:r>
+              <a:rPr sz="1500" b="0" i="1">
+                <a:solidFill>
+                  <a:srgbClr val="F1ECDD"/>
                 </a:solidFill>
                 <a:latin typeface="Calibri"/>
               </a:rPr>
-              <a:t>✓  Dein Wochenrhythmus mit den 4 Rollen (Säule 1)</a:t>
-            </a:r>
-          </a:p>
-          <a:p>
-            <a:pPr algn="l">
-              <a:spcBef>
-                <a:spcPts val="0"/>
-              </a:spcBef>
-              <a:spcAft>
-                <a:spcPts val="1400"/>
-              </a:spcAft>
-            </a:pPr>
-            <a:r>
-              <a:rPr sz="2100" b="0" i="0">
-                <a:solidFill>
-                  <a:srgbClr val="2E7D57"/>
-                </a:solidFill>
-                <a:latin typeface="Calibri"/>
-              </a:rPr>
-              <a:t>✓  Dein Hütchen-Inventar mit den 7 Rollen (Säule 2)</a:t>
-            </a:r>
-          </a:p>
-          <a:p>
-            <a:pPr algn="l">
-              <a:spcBef>
-                <a:spcPts val="0"/>
-              </a:spcBef>
-              <a:spcAft>
-                <a:spcPts val="1400"/>
-              </a:spcAft>
-            </a:pPr>
-            <a:r>
-              <a:rPr sz="2100" b="0" i="0">
-                <a:solidFill>
-                  <a:srgbClr val="2E7D57"/>
-                </a:solidFill>
-                <a:latin typeface="Calibri"/>
-              </a:rPr>
-              <a:t>✓  Deine Aufgaben durch den 4-Filter (Säule 2)</a:t>
-            </a:r>
-          </a:p>
-          <a:p>
-            <a:pPr algn="l">
-              <a:spcBef>
-                <a:spcPts val="0"/>
-              </a:spcBef>
-              <a:spcAft>
-                <a:spcPts val="1400"/>
-              </a:spcAft>
-            </a:pPr>
-            <a:r>
-              <a:rPr sz="2000" b="0" i="1">
-                <a:solidFill>
-                  <a:srgbClr val="6E6E6E"/>
-                </a:solidFill>
-                <a:latin typeface="Calibri"/>
-              </a:rPr>
-              <a:t>Alles da und ehrlich erarbeitet — aber noch auf Papier verstreut.</a:t>
-            </a:r>
-          </a:p>
-        </p:txBody>
-      </p:sp>
-    </p:spTree>
-  </p:cSld>
-  <p:clrMapOvr>
-    <a:masterClrMapping/>
-  </p:clrMapOvr>
-</p:sld>
-</file>
-
-<file path=ppt/slides/slide3.xml><?xml version="1.0" encoding="utf-8"?>
-<p:sld xmlns:a="http://schemas.openxmlformats.org/drawingml/2006/main" xmlns:p="http://schemas.openxmlformats.org/presentationml/2006/main" xmlns:r="http://schemas.openxmlformats.org/officeDocument/2006/relationships">
-  <p:cSld>
-    <p:bg>
-      <p:bgPr>
-        <a:solidFill>
-          <a:srgbClr val="FFFFFF"/>
-        </a:solidFill>
-        <a:effectLst/>
-      </p:bgPr>
-    </p:bg>
-    <p:spTree>
-      <p:nvGrpSpPr>
-        <p:cNvPr id="1" name=""/>
-        <p:cNvGrpSpPr/>
-        <p:nvPr/>
-      </p:nvGrpSpPr>
-      <p:grpSpPr/>
-      <p:sp>
-        <p:nvSpPr>
-          <p:cNvPr id="2" name="Rectangle 1"/>
-          <p:cNvSpPr/>
-          <p:nvPr/>
-        </p:nvSpPr>
-        <p:spPr>
-          <a:xfrm>
-            <a:off x="548640" y="502920"/>
-            <a:ext cx="201168" cy="201168"/>
-          </a:xfrm>
-          <a:prstGeom prst="rect">
-            <a:avLst/>
-          </a:prstGeom>
-          <a:solidFill>
-            <a:srgbClr val="1F6F6B"/>
-          </a:solidFill>
-          <a:ln>
-            <a:noFill/>
-          </a:ln>
-          <a:effectLst/>
-        </p:spPr>
-        <p:style>
-          <a:lnRef idx="1">
-            <a:schemeClr val="accent1"/>
-          </a:lnRef>
-          <a:fillRef idx="3">
-            <a:schemeClr val="accent1"/>
-          </a:fillRef>
-          <a:effectRef idx="2">
-            <a:schemeClr val="accent1"/>
-          </a:effectRef>
-          <a:fontRef idx="minor">
-            <a:schemeClr val="lt1"/>
-          </a:fontRef>
-        </p:style>
-        <p:txBody>
-          <a:bodyPr rtlCol="0" anchor="ctr"/>
-          <a:lstStyle/>
-          <a:p>
-            <a:pPr algn="ctr"/>
-          </a:p>
-        </p:txBody>
-      </p:sp>
-      <p:sp>
-        <p:nvSpPr>
-          <p:cNvPr id="3" name="TextBox 2"/>
+              <a:t>Sonntag aufgeschrieben → Mittwoch verloren → Sonntag wieder bei null.</a:t>
+            </a:r>
+          </a:p>
+        </p:txBody>
+      </p:sp>
+      <p:sp>
+        <p:nvSpPr>
+          <p:cNvPr id="6" name="TextBox 5"/>
           <p:cNvSpPr txBox="1"/>
           <p:nvPr/>
         </p:nvSpPr>
         <p:spPr>
           <a:xfrm>
-            <a:off x="868680" y="457200"/>
-            <a:ext cx="10424160" cy="1005840"/>
+            <a:off x="457200" y="4754880"/>
+            <a:ext cx="5486400" cy="274320"/>
           </a:xfrm>
           <a:prstGeom prst="rect">
             <a:avLst/>
@@ -4442,36 +4721,28 @@
           </a:bodyPr>
           <a:lstStyle/>
           <a:p>
-            <a:pPr algn="l">
-              <a:spcBef>
-                <a:spcPts val="0"/>
-              </a:spcBef>
-              <a:spcAft>
-                <a:spcPts val="1000"/>
-              </a:spcAft>
-            </a:pPr>
-            <a:r>
-              <a:rPr sz="3200" b="1" i="0">
-                <a:solidFill>
-                  <a:srgbClr val="1F6F6B"/>
-                </a:solidFill>
-                <a:latin typeface="Georgia"/>
-              </a:rPr>
-              <a:t>Das Problem mit Papier</a:t>
-            </a:r>
-          </a:p>
-        </p:txBody>
-      </p:sp>
-      <p:sp>
-        <p:nvSpPr>
-          <p:cNvPr id="4" name="TextBox 3"/>
+            <a:r>
+              <a:rPr sz="900" b="0" i="0">
+                <a:solidFill>
+                  <a:srgbClr val="F1ECDD"/>
+                </a:solidFill>
+                <a:latin typeface="Calibri"/>
+              </a:rPr>
+              <a:t>Mama-CEO · Säule 3 · Lektion 3.1</a:t>
+            </a:r>
+          </a:p>
+        </p:txBody>
+      </p:sp>
+      <p:sp>
+        <p:nvSpPr>
+          <p:cNvPr id="7" name="TextBox 6"/>
           <p:cNvSpPr txBox="1"/>
           <p:nvPr/>
         </p:nvSpPr>
         <p:spPr>
           <a:xfrm>
-            <a:off x="868680" y="1783080"/>
-            <a:ext cx="10424160" cy="4572000"/>
+            <a:off x="6400800" y="4754880"/>
+            <a:ext cx="2286000" cy="274320"/>
           </a:xfrm>
           <a:prstGeom prst="rect">
             <a:avLst/>
@@ -4484,60 +4755,15 @@
           </a:bodyPr>
           <a:lstStyle/>
           <a:p>
-            <a:pPr algn="l">
-              <a:spcBef>
-                <a:spcPts val="0"/>
-              </a:spcBef>
-              <a:spcAft>
-                <a:spcPts val="1400"/>
-              </a:spcAft>
-            </a:pPr>
-            <a:r>
-              <a:rPr sz="2600" b="1" i="0">
-                <a:solidFill>
-                  <a:srgbClr val="2A2A2A"/>
-                </a:solidFill>
-                <a:latin typeface="Georgia"/>
-              </a:rPr>
-              <a:t>Ein Brain Dump ohne Zuhause verpufft nach 3 Tagen.</a:t>
-            </a:r>
-          </a:p>
-          <a:p>
-            <a:pPr algn="l">
-              <a:spcBef>
-                <a:spcPts val="0"/>
-              </a:spcBef>
-              <a:spcAft>
-                <a:spcPts val="1400"/>
-              </a:spcAft>
-            </a:pPr>
-            <a:r>
-              <a:rPr sz="2100" b="0" i="0">
-                <a:solidFill>
-                  <a:srgbClr val="2A2A2A"/>
+            <a:pPr algn="r"/>
+            <a:r>
+              <a:rPr sz="900" b="0" i="0">
+                <a:solidFill>
+                  <a:srgbClr val="F1ECDD"/>
                 </a:solidFill>
                 <a:latin typeface="Calibri"/>
               </a:rPr>
-              <a:t>Sonntag aufgeschrieben → Mittwoch den Zettel verloren → Sonntag wieder bei null.</a:t>
-            </a:r>
-          </a:p>
-          <a:p>
-            <a:pPr algn="l">
-              <a:spcBef>
-                <a:spcPts val="0"/>
-              </a:spcBef>
-              <a:spcAft>
-                <a:spcPts val="1400"/>
-              </a:spcAft>
-            </a:pPr>
-            <a:r>
-              <a:rPr sz="2000" b="0" i="1">
-                <a:solidFill>
-                  <a:srgbClr val="6E6E6E"/>
-                </a:solidFill>
-                <a:latin typeface="Calibri"/>
-              </a:rPr>
-              <a:t>Genau diesen Kreislauf brechen wir jetzt.</a:t>
+              <a:t>Mum Life Balance</a:t>
             </a:r>
           </a:p>
         </p:txBody>
@@ -4570,58 +4796,14 @@
       <p:grpSpPr/>
       <p:sp>
         <p:nvSpPr>
-          <p:cNvPr id="2" name="Rectangle 1"/>
-          <p:cNvSpPr/>
-          <p:nvPr/>
-        </p:nvSpPr>
-        <p:spPr>
-          <a:xfrm>
-            <a:off x="548640" y="502920"/>
-            <a:ext cx="201168" cy="201168"/>
-          </a:xfrm>
-          <a:prstGeom prst="rect">
-            <a:avLst/>
-          </a:prstGeom>
-          <a:solidFill>
-            <a:srgbClr val="1F6F6B"/>
-          </a:solidFill>
-          <a:ln>
-            <a:noFill/>
-          </a:ln>
-          <a:effectLst/>
-        </p:spPr>
-        <p:style>
-          <a:lnRef idx="1">
-            <a:schemeClr val="accent1"/>
-          </a:lnRef>
-          <a:fillRef idx="3">
-            <a:schemeClr val="accent1"/>
-          </a:fillRef>
-          <a:effectRef idx="2">
-            <a:schemeClr val="accent1"/>
-          </a:effectRef>
-          <a:fontRef idx="minor">
-            <a:schemeClr val="lt1"/>
-          </a:fontRef>
-        </p:style>
-        <p:txBody>
-          <a:bodyPr rtlCol="0" anchor="ctr"/>
-          <a:lstStyle/>
-          <a:p>
-            <a:pPr algn="ctr"/>
-          </a:p>
-        </p:txBody>
-      </p:sp>
-      <p:sp>
-        <p:nvSpPr>
-          <p:cNvPr id="3" name="TextBox 2"/>
+          <p:cNvPr id="2" name="TextBox 1"/>
           <p:cNvSpPr txBox="1"/>
           <p:nvPr/>
         </p:nvSpPr>
         <p:spPr>
           <a:xfrm>
-            <a:off x="868680" y="457200"/>
-            <a:ext cx="10424160" cy="1005840"/>
+            <a:off x="548640" y="457200"/>
+            <a:ext cx="8046720" cy="914400"/>
           </a:xfrm>
           <a:prstGeom prst="rect">
             <a:avLst/>
@@ -4634,7 +4816,41 @@
           </a:bodyPr>
           <a:lstStyle/>
           <a:p>
-            <a:pPr algn="l">
+            <a:r>
+              <a:rPr sz="3000" b="1" i="0">
+                <a:solidFill>
+                  <a:srgbClr val="1A3A4A"/>
+                </a:solidFill>
+                <a:latin typeface="Georgia"/>
+              </a:rPr>
+              <a:t>Du planst von oben nach unten</a:t>
+            </a:r>
+          </a:p>
+        </p:txBody>
+      </p:sp>
+      <p:sp>
+        <p:nvSpPr>
+          <p:cNvPr id="3" name="TextBox 2"/>
+          <p:cNvSpPr txBox="1"/>
+          <p:nvPr/>
+        </p:nvSpPr>
+        <p:spPr>
+          <a:xfrm>
+            <a:off x="548640" y="1417320"/>
+            <a:ext cx="8046720" cy="3154680"/>
+          </a:xfrm>
+          <a:prstGeom prst="rect">
+            <a:avLst/>
+          </a:prstGeom>
+          <a:noFill/>
+        </p:spPr>
+        <p:txBody>
+          <a:bodyPr wrap="square" anchor="t" lIns="0" rIns="0" tIns="0" bIns="0">
+            <a:spAutoFit/>
+          </a:bodyPr>
+          <a:lstStyle/>
+          <a:p>
+            <a:pPr>
               <a:spcBef>
                 <a:spcPts val="0"/>
               </a:spcBef>
@@ -4643,13 +4859,70 @@
               </a:spcAft>
             </a:pPr>
             <a:r>
-              <a:rPr sz="3200" b="1" i="0">
-                <a:solidFill>
-                  <a:srgbClr val="1F6F6B"/>
+              <a:rPr sz="2100" b="1" i="0">
+                <a:solidFill>
+                  <a:srgbClr val="1A3A4A"/>
                 </a:solidFill>
                 <a:latin typeface="Georgia"/>
               </a:rPr>
-              <a:t>Du planst von oben nach unten</a:t>
+              <a:t>JAHR  →  MONAT  →  WOCHE  →  TAG</a:t>
+            </a:r>
+          </a:p>
+          <a:p>
+            <a:pPr>
+              <a:spcBef>
+                <a:spcPts val="0"/>
+              </a:spcBef>
+              <a:spcAft>
+                <a:spcPts val="900"/>
+              </a:spcAft>
+            </a:pPr>
+            <a:r>
+              <a:rPr sz="1600" b="0" i="0">
+                <a:solidFill>
+                  <a:srgbClr val="2C3E50"/>
+                </a:solidFill>
+                <a:latin typeface="Calibri"/>
+              </a:rPr>
+              <a:t>Keinen sinnvollen Tag ohne die Woche.</a:t>
+            </a:r>
+          </a:p>
+          <a:p>
+            <a:pPr>
+              <a:spcBef>
+                <a:spcPts val="0"/>
+              </a:spcBef>
+              <a:spcAft>
+                <a:spcPts val="900"/>
+              </a:spcAft>
+            </a:pPr>
+            <a:r>
+              <a:rPr sz="1600" b="0" i="0">
+                <a:solidFill>
+                  <a:srgbClr val="2C3E50"/>
+                </a:solidFill>
+                <a:latin typeface="Calibri"/>
+              </a:rPr>
+              <a:t>Keine Woche ohne das Jahr.</a:t>
+            </a:r>
+          </a:p>
+          <a:p>
+            <a:pPr>
+              <a:spcBef>
+                <a:spcPts val="0"/>
+              </a:spcBef>
+              <a:spcAft>
+                <a:spcPts val="800"/>
+              </a:spcAft>
+            </a:pPr>
+            <a:r>
+              <a:rPr sz="1400" b="0" i="1">
+                <a:solidFill>
+                  <a:srgbClr val="7A8A95"/>
+                </a:solidFill>
+                <a:latin typeface="Calibri"/>
+              </a:rPr>
+              <a:t>Darum bauen wir es genau in dieser Reihenfolge auf.</a:t>
             </a:r>
           </a:p>
         </p:txBody>
@@ -4662,8 +4935,8 @@
         </p:nvSpPr>
         <p:spPr>
           <a:xfrm>
-            <a:off x="868680" y="1783080"/>
-            <a:ext cx="10424160" cy="4572000"/>
+            <a:off x="457200" y="4754880"/>
+            <a:ext cx="5486400" cy="274320"/>
           </a:xfrm>
           <a:prstGeom prst="rect">
             <a:avLst/>
@@ -4676,79 +4949,49 @@
           </a:bodyPr>
           <a:lstStyle/>
           <a:p>
-            <a:pPr algn="l">
-              <a:spcBef>
-                <a:spcPts val="0"/>
-              </a:spcBef>
-              <a:spcAft>
-                <a:spcPts val="1400"/>
-              </a:spcAft>
-            </a:pPr>
-            <a:r>
-              <a:rPr sz="2600" b="1" i="0">
-                <a:solidFill>
-                  <a:srgbClr val="2A2A2A"/>
-                </a:solidFill>
-                <a:latin typeface="Georgia"/>
-              </a:rPr>
-              <a:t>JAHR  →  MONAT  →  WOCHE  →  TAG</a:t>
-            </a:r>
-          </a:p>
-          <a:p>
-            <a:pPr algn="l">
-              <a:spcBef>
-                <a:spcPts val="0"/>
-              </a:spcBef>
-              <a:spcAft>
-                <a:spcPts val="1400"/>
-              </a:spcAft>
-            </a:pPr>
-            <a:r>
-              <a:rPr sz="2100" b="0" i="0">
-                <a:solidFill>
-                  <a:srgbClr val="2A2A2A"/>
+            <a:r>
+              <a:rPr sz="900" b="0" i="0">
+                <a:solidFill>
+                  <a:srgbClr val="7A8A95"/>
                 </a:solidFill>
                 <a:latin typeface="Calibri"/>
               </a:rPr>
-              <a:t>Keinen sinnvollen Tag ohne die Woche.</a:t>
-            </a:r>
-          </a:p>
-          <a:p>
-            <a:pPr algn="l">
-              <a:spcBef>
-                <a:spcPts val="0"/>
-              </a:spcBef>
-              <a:spcAft>
-                <a:spcPts val="1400"/>
-              </a:spcAft>
-            </a:pPr>
-            <a:r>
-              <a:rPr sz="2100" b="0" i="0">
-                <a:solidFill>
-                  <a:srgbClr val="2A2A2A"/>
+              <a:t>Mama-CEO · Säule 3 · Lektion 3.1</a:t>
+            </a:r>
+          </a:p>
+        </p:txBody>
+      </p:sp>
+      <p:sp>
+        <p:nvSpPr>
+          <p:cNvPr id="5" name="TextBox 4"/>
+          <p:cNvSpPr txBox="1"/>
+          <p:nvPr/>
+        </p:nvSpPr>
+        <p:spPr>
+          <a:xfrm>
+            <a:off x="6400800" y="4754880"/>
+            <a:ext cx="2286000" cy="274320"/>
+          </a:xfrm>
+          <a:prstGeom prst="rect">
+            <a:avLst/>
+          </a:prstGeom>
+          <a:noFill/>
+        </p:spPr>
+        <p:txBody>
+          <a:bodyPr wrap="square" anchor="t" lIns="0" rIns="0" tIns="0" bIns="0">
+            <a:spAutoFit/>
+          </a:bodyPr>
+          <a:lstStyle/>
+          <a:p>
+            <a:pPr algn="r"/>
+            <a:r>
+              <a:rPr sz="900" b="0" i="0">
+                <a:solidFill>
+                  <a:srgbClr val="7A8A95"/>
                 </a:solidFill>
                 <a:latin typeface="Calibri"/>
               </a:rPr>
-              <a:t>Keine Woche ohne das Jahr.</a:t>
-            </a:r>
-          </a:p>
-          <a:p>
-            <a:pPr algn="l">
-              <a:spcBef>
-                <a:spcPts val="0"/>
-              </a:spcBef>
-              <a:spcAft>
-                <a:spcPts val="1400"/>
-              </a:spcAft>
-            </a:pPr>
-            <a:r>
-              <a:rPr sz="2000" b="0" i="1">
-                <a:solidFill>
-                  <a:srgbClr val="6E6E6E"/>
-                </a:solidFill>
-                <a:latin typeface="Calibri"/>
-              </a:rPr>
-              <a:t>Darum bauen wir es genau in dieser Reihenfolge auf.</a:t>
+              <a:t>Mum Life Balance</a:t>
             </a:r>
           </a:p>
         </p:txBody>
@@ -4781,58 +5024,14 @@
       <p:grpSpPr/>
       <p:sp>
         <p:nvSpPr>
-          <p:cNvPr id="2" name="Rectangle 1"/>
-          <p:cNvSpPr/>
-          <p:nvPr/>
-        </p:nvSpPr>
-        <p:spPr>
-          <a:xfrm>
-            <a:off x="548640" y="502920"/>
-            <a:ext cx="201168" cy="201168"/>
-          </a:xfrm>
-          <a:prstGeom prst="rect">
-            <a:avLst/>
-          </a:prstGeom>
-          <a:solidFill>
-            <a:srgbClr val="1F6F6B"/>
-          </a:solidFill>
-          <a:ln>
-            <a:noFill/>
-          </a:ln>
-          <a:effectLst/>
-        </p:spPr>
-        <p:style>
-          <a:lnRef idx="1">
-            <a:schemeClr val="accent1"/>
-          </a:lnRef>
-          <a:fillRef idx="3">
-            <a:schemeClr val="accent1"/>
-          </a:fillRef>
-          <a:effectRef idx="2">
-            <a:schemeClr val="accent1"/>
-          </a:effectRef>
-          <a:fontRef idx="minor">
-            <a:schemeClr val="lt1"/>
-          </a:fontRef>
-        </p:style>
-        <p:txBody>
-          <a:bodyPr rtlCol="0" anchor="ctr"/>
-          <a:lstStyle/>
-          <a:p>
-            <a:pPr algn="ctr"/>
-          </a:p>
-        </p:txBody>
-      </p:sp>
-      <p:sp>
-        <p:nvSpPr>
-          <p:cNvPr id="3" name="TextBox 2"/>
+          <p:cNvPr id="2" name="TextBox 1"/>
           <p:cNvSpPr txBox="1"/>
           <p:nvPr/>
         </p:nvSpPr>
         <p:spPr>
           <a:xfrm>
-            <a:off x="868680" y="457200"/>
-            <a:ext cx="10424160" cy="1005840"/>
+            <a:off x="548640" y="457200"/>
+            <a:ext cx="8046720" cy="822960"/>
           </a:xfrm>
           <a:prstGeom prst="rect">
             <a:avLst/>
@@ -4845,18 +5044,10 @@
           </a:bodyPr>
           <a:lstStyle/>
           <a:p>
-            <a:pPr algn="l">
-              <a:spcBef>
-                <a:spcPts val="0"/>
-              </a:spcBef>
-              <a:spcAft>
-                <a:spcPts val="1000"/>
-              </a:spcAft>
-            </a:pPr>
-            <a:r>
-              <a:rPr sz="3200" b="1" i="0">
-                <a:solidFill>
-                  <a:srgbClr val="1F6F6B"/>
+            <a:r>
+              <a:rPr sz="3000" b="1" i="0">
+                <a:solidFill>
+                  <a:srgbClr val="1A3A4A"/>
                 </a:solidFill>
                 <a:latin typeface="Georgia"/>
               </a:rPr>
@@ -4867,14 +5058,14 @@
       </p:sp>
       <p:sp>
         <p:nvSpPr>
-          <p:cNvPr id="4" name="TextBox 3"/>
+          <p:cNvPr id="3" name="TextBox 2"/>
           <p:cNvSpPr txBox="1"/>
           <p:nvPr/>
         </p:nvSpPr>
         <p:spPr>
           <a:xfrm>
-            <a:off x="868680" y="1783080"/>
-            <a:ext cx="10424160" cy="4572000"/>
+            <a:off x="548640" y="1371600"/>
+            <a:ext cx="822960" cy="640080"/>
           </a:xfrm>
           <a:prstGeom prst="rect">
             <a:avLst/>
@@ -4887,98 +5078,385 @@
           </a:bodyPr>
           <a:lstStyle/>
           <a:p>
-            <a:pPr algn="l">
+            <a:r>
+              <a:rPr sz="2800" b="1" i="0">
+                <a:solidFill>
+                  <a:srgbClr val="DC822E"/>
+                </a:solidFill>
+                <a:latin typeface="Georgia"/>
+              </a:rPr>
+              <a:t>01</a:t>
+            </a:r>
+          </a:p>
+        </p:txBody>
+      </p:sp>
+      <p:sp>
+        <p:nvSpPr>
+          <p:cNvPr id="4" name="TextBox 3"/>
+          <p:cNvSpPr txBox="1"/>
+          <p:nvPr/>
+        </p:nvSpPr>
+        <p:spPr>
+          <a:xfrm>
+            <a:off x="1371600" y="1408176"/>
+            <a:ext cx="7223760" cy="713232"/>
+          </a:xfrm>
+          <a:prstGeom prst="rect">
+            <a:avLst/>
+          </a:prstGeom>
+          <a:noFill/>
+        </p:spPr>
+        <p:txBody>
+          <a:bodyPr wrap="square" anchor="t" lIns="0" rIns="0" tIns="0" bIns="0">
+            <a:spAutoFit/>
+          </a:bodyPr>
+          <a:lstStyle/>
+          <a:p>
+            <a:r>
+              <a:rPr sz="1600" b="1" i="0">
+                <a:solidFill>
+                  <a:srgbClr val="2C3E50"/>
+                </a:solidFill>
+                <a:latin typeface="Calibri"/>
+              </a:rPr>
+              <a:t>Jahr</a:t>
+            </a:r>
+          </a:p>
+          <a:p>
+            <a:pPr>
               <a:spcBef>
-                <a:spcPts val="0"/>
+                <a:spcPts val="100"/>
               </a:spcBef>
-              <a:spcAft>
-                <a:spcPts val="1400"/>
-              </a:spcAft>
             </a:pPr>
             <a:r>
-              <a:rPr sz="2100" b="0" i="0">
-                <a:solidFill>
-                  <a:srgbClr val="2A2A2A"/>
+              <a:rPr sz="1200" b="0" i="0">
+                <a:solidFill>
+                  <a:srgbClr val="7A8A95"/>
                 </a:solidFill>
                 <a:latin typeface="Calibri"/>
               </a:rPr>
-              <a:t>JAHR — was überhaupt kommt</a:t>
-            </a:r>
-          </a:p>
-          <a:p>
-            <a:pPr algn="l">
+              <a:t>was überhaupt kommt</a:t>
+            </a:r>
+          </a:p>
+        </p:txBody>
+      </p:sp>
+      <p:sp>
+        <p:nvSpPr>
+          <p:cNvPr id="5" name="TextBox 4"/>
+          <p:cNvSpPr txBox="1"/>
+          <p:nvPr/>
+        </p:nvSpPr>
+        <p:spPr>
+          <a:xfrm>
+            <a:off x="548640" y="2084832"/>
+            <a:ext cx="822960" cy="640080"/>
+          </a:xfrm>
+          <a:prstGeom prst="rect">
+            <a:avLst/>
+          </a:prstGeom>
+          <a:noFill/>
+        </p:spPr>
+        <p:txBody>
+          <a:bodyPr wrap="square" anchor="t" lIns="0" rIns="0" tIns="0" bIns="0">
+            <a:spAutoFit/>
+          </a:bodyPr>
+          <a:lstStyle/>
+          <a:p>
+            <a:r>
+              <a:rPr sz="2800" b="1" i="0">
+                <a:solidFill>
+                  <a:srgbClr val="DC822E"/>
+                </a:solidFill>
+                <a:latin typeface="Georgia"/>
+              </a:rPr>
+              <a:t>02</a:t>
+            </a:r>
+          </a:p>
+        </p:txBody>
+      </p:sp>
+      <p:sp>
+        <p:nvSpPr>
+          <p:cNvPr id="6" name="TextBox 5"/>
+          <p:cNvSpPr txBox="1"/>
+          <p:nvPr/>
+        </p:nvSpPr>
+        <p:spPr>
+          <a:xfrm>
+            <a:off x="1371600" y="2121408"/>
+            <a:ext cx="7223760" cy="713232"/>
+          </a:xfrm>
+          <a:prstGeom prst="rect">
+            <a:avLst/>
+          </a:prstGeom>
+          <a:noFill/>
+        </p:spPr>
+        <p:txBody>
+          <a:bodyPr wrap="square" anchor="t" lIns="0" rIns="0" tIns="0" bIns="0">
+            <a:spAutoFit/>
+          </a:bodyPr>
+          <a:lstStyle/>
+          <a:p>
+            <a:r>
+              <a:rPr sz="1600" b="1" i="0">
+                <a:solidFill>
+                  <a:srgbClr val="2C3E50"/>
+                </a:solidFill>
+                <a:latin typeface="Calibri"/>
+              </a:rPr>
+              <a:t>Monat</a:t>
+            </a:r>
+          </a:p>
+          <a:p>
+            <a:pPr>
               <a:spcBef>
-                <a:spcPts val="0"/>
+                <a:spcPts val="100"/>
               </a:spcBef>
-              <a:spcAft>
-                <a:spcPts val="1400"/>
-              </a:spcAft>
             </a:pPr>
             <a:r>
-              <a:rPr sz="2100" b="0" i="0">
-                <a:solidFill>
-                  <a:srgbClr val="2A2A2A"/>
+              <a:rPr sz="1200" b="0" i="0">
+                <a:solidFill>
+                  <a:srgbClr val="7A8A95"/>
                 </a:solidFill>
                 <a:latin typeface="Calibri"/>
               </a:rPr>
-              <a:t>MONAT — 1 Fokus + 3 Ziele</a:t>
-            </a:r>
-          </a:p>
-          <a:p>
-            <a:pPr algn="l">
+              <a:t>1 Fokus + 3 Ziele</a:t>
+            </a:r>
+          </a:p>
+        </p:txBody>
+      </p:sp>
+      <p:sp>
+        <p:nvSpPr>
+          <p:cNvPr id="7" name="TextBox 6"/>
+          <p:cNvSpPr txBox="1"/>
+          <p:nvPr/>
+        </p:nvSpPr>
+        <p:spPr>
+          <a:xfrm>
+            <a:off x="548640" y="2798064"/>
+            <a:ext cx="822960" cy="640080"/>
+          </a:xfrm>
+          <a:prstGeom prst="rect">
+            <a:avLst/>
+          </a:prstGeom>
+          <a:noFill/>
+        </p:spPr>
+        <p:txBody>
+          <a:bodyPr wrap="square" anchor="t" lIns="0" rIns="0" tIns="0" bIns="0">
+            <a:spAutoFit/>
+          </a:bodyPr>
+          <a:lstStyle/>
+          <a:p>
+            <a:r>
+              <a:rPr sz="2800" b="1" i="0">
+                <a:solidFill>
+                  <a:srgbClr val="DC822E"/>
+                </a:solidFill>
+                <a:latin typeface="Georgia"/>
+              </a:rPr>
+              <a:t>03</a:t>
+            </a:r>
+          </a:p>
+        </p:txBody>
+      </p:sp>
+      <p:sp>
+        <p:nvSpPr>
+          <p:cNvPr id="8" name="TextBox 7"/>
+          <p:cNvSpPr txBox="1"/>
+          <p:nvPr/>
+        </p:nvSpPr>
+        <p:spPr>
+          <a:xfrm>
+            <a:off x="1371600" y="2834640"/>
+            <a:ext cx="7223760" cy="713232"/>
+          </a:xfrm>
+          <a:prstGeom prst="rect">
+            <a:avLst/>
+          </a:prstGeom>
+          <a:noFill/>
+        </p:spPr>
+        <p:txBody>
+          <a:bodyPr wrap="square" anchor="t" lIns="0" rIns="0" tIns="0" bIns="0">
+            <a:spAutoFit/>
+          </a:bodyPr>
+          <a:lstStyle/>
+          <a:p>
+            <a:r>
+              <a:rPr sz="1600" b="1" i="0">
+                <a:solidFill>
+                  <a:srgbClr val="2C3E50"/>
+                </a:solidFill>
+                <a:latin typeface="Calibri"/>
+              </a:rPr>
+              <a:t>Woche</a:t>
+            </a:r>
+          </a:p>
+          <a:p>
+            <a:pPr>
               <a:spcBef>
-                <a:spcPts val="0"/>
+                <a:spcPts val="100"/>
               </a:spcBef>
-              <a:spcAft>
-                <a:spcPts val="1400"/>
-              </a:spcAft>
             </a:pPr>
             <a:r>
-              <a:rPr sz="2100" b="0" i="0">
-                <a:solidFill>
-                  <a:srgbClr val="2A2A2A"/>
+              <a:rPr sz="1200" b="0" i="0">
+                <a:solidFill>
+                  <a:srgbClr val="7A8A95"/>
                 </a:solidFill>
                 <a:latin typeface="Calibri"/>
               </a:rPr>
-              <a:t>WOCHE — deine Lebens-Bereiche verteilt</a:t>
-            </a:r>
-          </a:p>
-          <a:p>
-            <a:pPr algn="l">
+              <a:t>deine Lebens-Bereiche verteilt</a:t>
+            </a:r>
+          </a:p>
+        </p:txBody>
+      </p:sp>
+      <p:sp>
+        <p:nvSpPr>
+          <p:cNvPr id="9" name="TextBox 8"/>
+          <p:cNvSpPr txBox="1"/>
+          <p:nvPr/>
+        </p:nvSpPr>
+        <p:spPr>
+          <a:xfrm>
+            <a:off x="548640" y="3511296"/>
+            <a:ext cx="822960" cy="640080"/>
+          </a:xfrm>
+          <a:prstGeom prst="rect">
+            <a:avLst/>
+          </a:prstGeom>
+          <a:noFill/>
+        </p:spPr>
+        <p:txBody>
+          <a:bodyPr wrap="square" anchor="t" lIns="0" rIns="0" tIns="0" bIns="0">
+            <a:spAutoFit/>
+          </a:bodyPr>
+          <a:lstStyle/>
+          <a:p>
+            <a:r>
+              <a:rPr sz="2800" b="1" i="0">
+                <a:solidFill>
+                  <a:srgbClr val="DC822E"/>
+                </a:solidFill>
+                <a:latin typeface="Georgia"/>
+              </a:rPr>
+              <a:t>04</a:t>
+            </a:r>
+          </a:p>
+        </p:txBody>
+      </p:sp>
+      <p:sp>
+        <p:nvSpPr>
+          <p:cNvPr id="10" name="TextBox 9"/>
+          <p:cNvSpPr txBox="1"/>
+          <p:nvPr/>
+        </p:nvSpPr>
+        <p:spPr>
+          <a:xfrm>
+            <a:off x="1371600" y="3547872"/>
+            <a:ext cx="7223760" cy="713232"/>
+          </a:xfrm>
+          <a:prstGeom prst="rect">
+            <a:avLst/>
+          </a:prstGeom>
+          <a:noFill/>
+        </p:spPr>
+        <p:txBody>
+          <a:bodyPr wrap="square" anchor="t" lIns="0" rIns="0" tIns="0" bIns="0">
+            <a:spAutoFit/>
+          </a:bodyPr>
+          <a:lstStyle/>
+          <a:p>
+            <a:r>
+              <a:rPr sz="1600" b="1" i="0">
+                <a:solidFill>
+                  <a:srgbClr val="2C3E50"/>
+                </a:solidFill>
+                <a:latin typeface="Calibri"/>
+              </a:rPr>
+              <a:t>Tag</a:t>
+            </a:r>
+          </a:p>
+          <a:p>
+            <a:pPr>
               <a:spcBef>
-                <a:spcPts val="0"/>
+                <a:spcPts val="100"/>
               </a:spcBef>
-              <a:spcAft>
-                <a:spcPts val="1400"/>
-              </a:spcAft>
             </a:pPr>
             <a:r>
-              <a:rPr sz="2100" b="0" i="0">
-                <a:solidFill>
-                  <a:srgbClr val="2A2A2A"/>
+              <a:rPr sz="1200" b="0" i="0">
+                <a:solidFill>
+                  <a:srgbClr val="7A8A95"/>
                 </a:solidFill>
                 <a:latin typeface="Calibri"/>
               </a:rPr>
-              <a:t>TAG — deine 3 wichtigsten Aufgaben</a:t>
-            </a:r>
-          </a:p>
-          <a:p>
-            <a:pPr algn="l">
-              <a:spcBef>
-                <a:spcPts val="0"/>
-              </a:spcBef>
-              <a:spcAft>
-                <a:spcPts val="1400"/>
-              </a:spcAft>
-            </a:pPr>
-            <a:r>
-              <a:rPr sz="2000" b="0" i="1">
-                <a:solidFill>
-                  <a:srgbClr val="6E6E6E"/>
+              <a:t>deine 3 wichtigsten Aufgaben</a:t>
+            </a:r>
+          </a:p>
+        </p:txBody>
+      </p:sp>
+      <p:sp>
+        <p:nvSpPr>
+          <p:cNvPr id="11" name="TextBox 10"/>
+          <p:cNvSpPr txBox="1"/>
+          <p:nvPr/>
+        </p:nvSpPr>
+        <p:spPr>
+          <a:xfrm>
+            <a:off x="457200" y="4754880"/>
+            <a:ext cx="5486400" cy="274320"/>
+          </a:xfrm>
+          <a:prstGeom prst="rect">
+            <a:avLst/>
+          </a:prstGeom>
+          <a:noFill/>
+        </p:spPr>
+        <p:txBody>
+          <a:bodyPr wrap="square" anchor="t" lIns="0" rIns="0" tIns="0" bIns="0">
+            <a:spAutoFit/>
+          </a:bodyPr>
+          <a:lstStyle/>
+          <a:p>
+            <a:r>
+              <a:rPr sz="900" b="0" i="0">
+                <a:solidFill>
+                  <a:srgbClr val="7A8A95"/>
                 </a:solidFill>
                 <a:latin typeface="Calibri"/>
               </a:rPr>
-              <a:t>Vier Stufen, die ineinandergreifen.</a:t>
+              <a:t>Mama-CEO · Säule 3 · Lektion 3.1</a:t>
+            </a:r>
+          </a:p>
+        </p:txBody>
+      </p:sp>
+      <p:sp>
+        <p:nvSpPr>
+          <p:cNvPr id="12" name="TextBox 11"/>
+          <p:cNvSpPr txBox="1"/>
+          <p:nvPr/>
+        </p:nvSpPr>
+        <p:spPr>
+          <a:xfrm>
+            <a:off x="6400800" y="4754880"/>
+            <a:ext cx="2286000" cy="274320"/>
+          </a:xfrm>
+          <a:prstGeom prst="rect">
+            <a:avLst/>
+          </a:prstGeom>
+          <a:noFill/>
+        </p:spPr>
+        <p:txBody>
+          <a:bodyPr wrap="square" anchor="t" lIns="0" rIns="0" tIns="0" bIns="0">
+            <a:spAutoFit/>
+          </a:bodyPr>
+          <a:lstStyle/>
+          <a:p>
+            <a:pPr algn="r"/>
+            <a:r>
+              <a:rPr sz="900" b="0" i="0">
+                <a:solidFill>
+                  <a:srgbClr val="7A8A95"/>
+                </a:solidFill>
+                <a:latin typeface="Calibri"/>
+              </a:rPr>
+              <a:t>Mum Life Balance</a:t>
             </a:r>
           </a:p>
         </p:txBody>
@@ -5011,58 +5489,14 @@
       <p:grpSpPr/>
       <p:sp>
         <p:nvSpPr>
-          <p:cNvPr id="2" name="Rectangle 1"/>
-          <p:cNvSpPr/>
-          <p:nvPr/>
-        </p:nvSpPr>
-        <p:spPr>
-          <a:xfrm>
-            <a:off x="548640" y="502920"/>
-            <a:ext cx="201168" cy="201168"/>
-          </a:xfrm>
-          <a:prstGeom prst="rect">
-            <a:avLst/>
-          </a:prstGeom>
-          <a:solidFill>
-            <a:srgbClr val="1F6F6B"/>
-          </a:solidFill>
-          <a:ln>
-            <a:noFill/>
-          </a:ln>
-          <a:effectLst/>
-        </p:spPr>
-        <p:style>
-          <a:lnRef idx="1">
-            <a:schemeClr val="accent1"/>
-          </a:lnRef>
-          <a:fillRef idx="3">
-            <a:schemeClr val="accent1"/>
-          </a:fillRef>
-          <a:effectRef idx="2">
-            <a:schemeClr val="accent1"/>
-          </a:effectRef>
-          <a:fontRef idx="minor">
-            <a:schemeClr val="lt1"/>
-          </a:fontRef>
-        </p:style>
-        <p:txBody>
-          <a:bodyPr rtlCol="0" anchor="ctr"/>
-          <a:lstStyle/>
-          <a:p>
-            <a:pPr algn="ctr"/>
-          </a:p>
-        </p:txBody>
-      </p:sp>
-      <p:sp>
-        <p:nvSpPr>
-          <p:cNvPr id="3" name="TextBox 2"/>
+          <p:cNvPr id="2" name="TextBox 1"/>
           <p:cNvSpPr txBox="1"/>
           <p:nvPr/>
         </p:nvSpPr>
         <p:spPr>
           <a:xfrm>
-            <a:off x="868680" y="457200"/>
-            <a:ext cx="10424160" cy="1005840"/>
+            <a:off x="548640" y="457200"/>
+            <a:ext cx="8046720" cy="914400"/>
           </a:xfrm>
           <a:prstGeom prst="rect">
             <a:avLst/>
@@ -5075,36 +5509,253 @@
           </a:bodyPr>
           <a:lstStyle/>
           <a:p>
-            <a:pPr algn="l">
+            <a:r>
+              <a:rPr sz="3000" b="1" i="0">
+                <a:solidFill>
+                  <a:srgbClr val="1A3A4A"/>
+                </a:solidFill>
+                <a:latin typeface="Georgia"/>
+              </a:rPr>
+              <a:t>Die 6 Lebens-Bereiche</a:t>
+            </a:r>
+          </a:p>
+        </p:txBody>
+      </p:sp>
+      <p:sp>
+        <p:nvSpPr>
+          <p:cNvPr id="3" name="TextBox 2"/>
+          <p:cNvSpPr txBox="1"/>
+          <p:nvPr/>
+        </p:nvSpPr>
+        <p:spPr>
+          <a:xfrm>
+            <a:off x="548640" y="1234440"/>
+            <a:ext cx="8046720" cy="457200"/>
+          </a:xfrm>
+          <a:prstGeom prst="rect">
+            <a:avLst/>
+          </a:prstGeom>
+          <a:noFill/>
+        </p:spPr>
+        <p:txBody>
+          <a:bodyPr wrap="square" anchor="t" lIns="0" rIns="0" tIns="0" bIns="0">
+            <a:spAutoFit/>
+          </a:bodyPr>
+          <a:lstStyle/>
+          <a:p>
+            <a:r>
+              <a:rPr sz="1300" b="0" i="0">
+                <a:solidFill>
+                  <a:srgbClr val="7A8A95"/>
+                </a:solidFill>
+                <a:latin typeface="Calibri"/>
+              </a:rPr>
+              <a:t>Damit deine Wochen nicht nur aus Business bestehen.</a:t>
+            </a:r>
+          </a:p>
+        </p:txBody>
+      </p:sp>
+      <p:sp>
+        <p:nvSpPr>
+          <p:cNvPr id="4" name="TextBox 3"/>
+          <p:cNvSpPr txBox="1"/>
+          <p:nvPr/>
+        </p:nvSpPr>
+        <p:spPr>
+          <a:xfrm>
+            <a:off x="548640" y="1783080"/>
+            <a:ext cx="8046720" cy="2788920"/>
+          </a:xfrm>
+          <a:prstGeom prst="rect">
+            <a:avLst/>
+          </a:prstGeom>
+          <a:noFill/>
+        </p:spPr>
+        <p:txBody>
+          <a:bodyPr wrap="square" anchor="t" lIns="0" rIns="0" tIns="0" bIns="0">
+            <a:spAutoFit/>
+          </a:bodyPr>
+          <a:lstStyle/>
+          <a:p>
+            <a:pPr>
               <a:spcBef>
                 <a:spcPts val="0"/>
               </a:spcBef>
               <a:spcAft>
-                <a:spcPts val="1000"/>
+                <a:spcPts val="900"/>
               </a:spcAft>
             </a:pPr>
             <a:r>
-              <a:rPr sz="3200" b="1" i="0">
-                <a:solidFill>
-                  <a:srgbClr val="1F6F6B"/>
-                </a:solidFill>
-                <a:latin typeface="Georgia"/>
-              </a:rPr>
-              <a:t>Die 6 Lebens-Bereiche</a:t>
-            </a:r>
-          </a:p>
-        </p:txBody>
-      </p:sp>
-      <p:sp>
-        <p:nvSpPr>
-          <p:cNvPr id="4" name="TextBox 3"/>
+              <a:rPr sz="1600" b="1" i="0">
+                <a:solidFill>
+                  <a:srgbClr val="DC822E"/>
+                </a:solidFill>
+                <a:latin typeface="Calibri"/>
+              </a:rPr>
+              <a:t>▪  </a:t>
+            </a:r>
+            <a:r>
+              <a:rPr sz="1600" b="0" i="0">
+                <a:solidFill>
+                  <a:srgbClr val="2C3E50"/>
+                </a:solidFill>
+                <a:latin typeface="Calibri"/>
+              </a:rPr>
+              <a:t>🛍  Produkterstellung</a:t>
+            </a:r>
+          </a:p>
+          <a:p>
+            <a:pPr>
+              <a:spcBef>
+                <a:spcPts val="0"/>
+              </a:spcBef>
+              <a:spcAft>
+                <a:spcPts val="900"/>
+              </a:spcAft>
+            </a:pPr>
+            <a:r>
+              <a:rPr sz="1600" b="1" i="0">
+                <a:solidFill>
+                  <a:srgbClr val="DC822E"/>
+                </a:solidFill>
+                <a:latin typeface="Calibri"/>
+              </a:rPr>
+              <a:t>▪  </a:t>
+            </a:r>
+            <a:r>
+              <a:rPr sz="1600" b="0" i="0">
+                <a:solidFill>
+                  <a:srgbClr val="2C3E50"/>
+                </a:solidFill>
+                <a:latin typeface="Calibri"/>
+              </a:rPr>
+              <a:t>📱  Sichtbarkeit / Content</a:t>
+            </a:r>
+          </a:p>
+          <a:p>
+            <a:pPr>
+              <a:spcBef>
+                <a:spcPts val="0"/>
+              </a:spcBef>
+              <a:spcAft>
+                <a:spcPts val="900"/>
+              </a:spcAft>
+            </a:pPr>
+            <a:r>
+              <a:rPr sz="1600" b="1" i="0">
+                <a:solidFill>
+                  <a:srgbClr val="DC822E"/>
+                </a:solidFill>
+                <a:latin typeface="Calibri"/>
+              </a:rPr>
+              <a:t>▪  </a:t>
+            </a:r>
+            <a:r>
+              <a:rPr sz="1600" b="0" i="0">
+                <a:solidFill>
+                  <a:srgbClr val="2C3E50"/>
+                </a:solidFill>
+                <a:latin typeface="Calibri"/>
+              </a:rPr>
+              <a:t>💬  Kundenbetreuung</a:t>
+            </a:r>
+          </a:p>
+          <a:p>
+            <a:pPr>
+              <a:spcBef>
+                <a:spcPts val="0"/>
+              </a:spcBef>
+              <a:spcAft>
+                <a:spcPts val="900"/>
+              </a:spcAft>
+            </a:pPr>
+            <a:r>
+              <a:rPr sz="1600" b="1" i="0">
+                <a:solidFill>
+                  <a:srgbClr val="DC822E"/>
+                </a:solidFill>
+                <a:latin typeface="Calibri"/>
+              </a:rPr>
+              <a:t>▪  </a:t>
+            </a:r>
+            <a:r>
+              <a:rPr sz="1600" b="0" i="0">
+                <a:solidFill>
+                  <a:srgbClr val="2C3E50"/>
+                </a:solidFill>
+                <a:latin typeface="Calibri"/>
+              </a:rPr>
+              <a:t>🧘  Me-Time</a:t>
+            </a:r>
+          </a:p>
+          <a:p>
+            <a:pPr>
+              <a:spcBef>
+                <a:spcPts val="0"/>
+              </a:spcBef>
+              <a:spcAft>
+                <a:spcPts val="900"/>
+              </a:spcAft>
+            </a:pPr>
+            <a:r>
+              <a:rPr sz="1600" b="1" i="0">
+                <a:solidFill>
+                  <a:srgbClr val="DC822E"/>
+                </a:solidFill>
+                <a:latin typeface="Calibri"/>
+              </a:rPr>
+              <a:t>▪  </a:t>
+            </a:r>
+            <a:r>
+              <a:rPr sz="1600" b="0" i="0">
+                <a:solidFill>
+                  <a:srgbClr val="2C3E50"/>
+                </a:solidFill>
+                <a:latin typeface="Calibri"/>
+              </a:rPr>
+              <a:t>👨‍👩‍👧‍👦  Familie + Haushalt</a:t>
+            </a:r>
+          </a:p>
+          <a:p>
+            <a:pPr>
+              <a:spcBef>
+                <a:spcPts val="0"/>
+              </a:spcBef>
+              <a:spcAft>
+                <a:spcPts val="900"/>
+              </a:spcAft>
+            </a:pPr>
+            <a:r>
+              <a:rPr sz="1600" b="1" i="0">
+                <a:solidFill>
+                  <a:srgbClr val="DC822E"/>
+                </a:solidFill>
+                <a:latin typeface="Calibri"/>
+              </a:rPr>
+              <a:t>▪  </a:t>
+            </a:r>
+            <a:r>
+              <a:rPr sz="1600" b="0" i="0">
+                <a:solidFill>
+                  <a:srgbClr val="2C3E50"/>
+                </a:solidFill>
+                <a:latin typeface="Calibri"/>
+              </a:rPr>
+              <a:t>📊  Reflexion</a:t>
+            </a:r>
+          </a:p>
+        </p:txBody>
+      </p:sp>
+      <p:sp>
+        <p:nvSpPr>
+          <p:cNvPr id="5" name="TextBox 4"/>
           <p:cNvSpPr txBox="1"/>
           <p:nvPr/>
         </p:nvSpPr>
         <p:spPr>
           <a:xfrm>
-            <a:off x="868680" y="1783080"/>
-            <a:ext cx="10424160" cy="4572000"/>
+            <a:off x="457200" y="4754880"/>
+            <a:ext cx="5486400" cy="274320"/>
           </a:xfrm>
           <a:prstGeom prst="rect">
             <a:avLst/>
@@ -5117,117 +5768,49 @@
           </a:bodyPr>
           <a:lstStyle/>
           <a:p>
-            <a:pPr algn="l">
-              <a:spcBef>
-                <a:spcPts val="0"/>
-              </a:spcBef>
-              <a:spcAft>
-                <a:spcPts val="1400"/>
-              </a:spcAft>
-            </a:pPr>
-            <a:r>
-              <a:rPr sz="2100" b="0" i="0">
-                <a:solidFill>
-                  <a:srgbClr val="2A2A2A"/>
+            <a:r>
+              <a:rPr sz="900" b="0" i="0">
+                <a:solidFill>
+                  <a:srgbClr val="7A8A95"/>
                 </a:solidFill>
                 <a:latin typeface="Calibri"/>
               </a:rPr>
-              <a:t>🛍  Produkterstellung</a:t>
-            </a:r>
-          </a:p>
-          <a:p>
-            <a:pPr algn="l">
-              <a:spcBef>
-                <a:spcPts val="0"/>
-              </a:spcBef>
-              <a:spcAft>
-                <a:spcPts val="1400"/>
-              </a:spcAft>
-            </a:pPr>
-            <a:r>
-              <a:rPr sz="2100" b="0" i="0">
-                <a:solidFill>
-                  <a:srgbClr val="2A2A2A"/>
+              <a:t>Mama-CEO · Säule 3 · Lektion 3.1</a:t>
+            </a:r>
+          </a:p>
+        </p:txBody>
+      </p:sp>
+      <p:sp>
+        <p:nvSpPr>
+          <p:cNvPr id="6" name="TextBox 5"/>
+          <p:cNvSpPr txBox="1"/>
+          <p:nvPr/>
+        </p:nvSpPr>
+        <p:spPr>
+          <a:xfrm>
+            <a:off x="6400800" y="4754880"/>
+            <a:ext cx="2286000" cy="274320"/>
+          </a:xfrm>
+          <a:prstGeom prst="rect">
+            <a:avLst/>
+          </a:prstGeom>
+          <a:noFill/>
+        </p:spPr>
+        <p:txBody>
+          <a:bodyPr wrap="square" anchor="t" lIns="0" rIns="0" tIns="0" bIns="0">
+            <a:spAutoFit/>
+          </a:bodyPr>
+          <a:lstStyle/>
+          <a:p>
+            <a:pPr algn="r"/>
+            <a:r>
+              <a:rPr sz="900" b="0" i="0">
+                <a:solidFill>
+                  <a:srgbClr val="7A8A95"/>
                 </a:solidFill>
                 <a:latin typeface="Calibri"/>
               </a:rPr>
-              <a:t>📱  Sichtbarkeit / Content</a:t>
-            </a:r>
-          </a:p>
-          <a:p>
-            <a:pPr algn="l">
-              <a:spcBef>
-                <a:spcPts val="0"/>
-              </a:spcBef>
-              <a:spcAft>
-                <a:spcPts val="1400"/>
-              </a:spcAft>
-            </a:pPr>
-            <a:r>
-              <a:rPr sz="2100" b="0" i="0">
-                <a:solidFill>
-                  <a:srgbClr val="2A2A2A"/>
-                </a:solidFill>
-                <a:latin typeface="Calibri"/>
-              </a:rPr>
-              <a:t>💬  Kundenbetreuung</a:t>
-            </a:r>
-          </a:p>
-          <a:p>
-            <a:pPr algn="l">
-              <a:spcBef>
-                <a:spcPts val="0"/>
-              </a:spcBef>
-              <a:spcAft>
-                <a:spcPts val="1400"/>
-              </a:spcAft>
-            </a:pPr>
-            <a:r>
-              <a:rPr sz="2100" b="0" i="0">
-                <a:solidFill>
-                  <a:srgbClr val="2A2A2A"/>
-                </a:solidFill>
-                <a:latin typeface="Calibri"/>
-              </a:rPr>
-              <a:t>🧘  Me-Time</a:t>
-            </a:r>
-          </a:p>
-          <a:p>
-            <a:pPr algn="l">
-              <a:spcBef>
-                <a:spcPts val="0"/>
-              </a:spcBef>
-              <a:spcAft>
-                <a:spcPts val="1400"/>
-              </a:spcAft>
-            </a:pPr>
-            <a:r>
-              <a:rPr sz="2100" b="0" i="0">
-                <a:solidFill>
-                  <a:srgbClr val="2A2A2A"/>
-                </a:solidFill>
-                <a:latin typeface="Calibri"/>
-              </a:rPr>
-              <a:t>👨‍👩‍👧‍👦  Familie + Haushalt</a:t>
-            </a:r>
-          </a:p>
-          <a:p>
-            <a:pPr algn="l">
-              <a:spcBef>
-                <a:spcPts val="0"/>
-              </a:spcBef>
-              <a:spcAft>
-                <a:spcPts val="1400"/>
-              </a:spcAft>
-            </a:pPr>
-            <a:r>
-              <a:rPr sz="2100" b="0" i="0">
-                <a:solidFill>
-                  <a:srgbClr val="2A2A2A"/>
-                </a:solidFill>
-                <a:latin typeface="Calibri"/>
-              </a:rPr>
-              <a:t>📊  Reflexion</a:t>
+              <a:t>Mum Life Balance</a:t>
             </a:r>
           </a:p>
         </p:txBody>
@@ -5260,20 +5843,263 @@
       <p:grpSpPr/>
       <p:sp>
         <p:nvSpPr>
-          <p:cNvPr id="2" name="Rectangle 1"/>
+          <p:cNvPr id="2" name="TextBox 1"/>
+          <p:cNvSpPr txBox="1"/>
+          <p:nvPr/>
+        </p:nvSpPr>
+        <p:spPr>
+          <a:xfrm>
+            <a:off x="548640" y="457200"/>
+            <a:ext cx="8046720" cy="914400"/>
+          </a:xfrm>
+          <a:prstGeom prst="rect">
+            <a:avLst/>
+          </a:prstGeom>
+          <a:noFill/>
+        </p:spPr>
+        <p:txBody>
+          <a:bodyPr wrap="square" anchor="t" lIns="0" rIns="0" tIns="0" bIns="0">
+            <a:spAutoFit/>
+          </a:bodyPr>
+          <a:lstStyle/>
+          <a:p>
+            <a:r>
+              <a:rPr sz="3000" b="1" i="0">
+                <a:solidFill>
+                  <a:srgbClr val="1A3A4A"/>
+                </a:solidFill>
+                <a:latin typeface="Georgia"/>
+              </a:rPr>
+              <a:t>Dein Brain Dump wandert ins System</a:t>
+            </a:r>
+          </a:p>
+        </p:txBody>
+      </p:sp>
+      <p:sp>
+        <p:nvSpPr>
+          <p:cNvPr id="3" name="TextBox 2"/>
+          <p:cNvSpPr txBox="1"/>
+          <p:nvPr/>
+        </p:nvSpPr>
+        <p:spPr>
+          <a:xfrm>
+            <a:off x="548640" y="1417320"/>
+            <a:ext cx="8046720" cy="3154680"/>
+          </a:xfrm>
+          <a:prstGeom prst="rect">
+            <a:avLst/>
+          </a:prstGeom>
+          <a:noFill/>
+        </p:spPr>
+        <p:txBody>
+          <a:bodyPr wrap="square" anchor="t" lIns="0" rIns="0" tIns="0" bIns="0">
+            <a:spAutoFit/>
+          </a:bodyPr>
+          <a:lstStyle/>
+          <a:p>
+            <a:pPr>
+              <a:spcBef>
+                <a:spcPts val="0"/>
+              </a:spcBef>
+              <a:spcAft>
+                <a:spcPts val="1000"/>
+              </a:spcAft>
+            </a:pPr>
+            <a:r>
+              <a:rPr sz="2100" b="1" i="0">
+                <a:solidFill>
+                  <a:srgbClr val="1A3A4A"/>
+                </a:solidFill>
+                <a:latin typeface="Georgia"/>
+              </a:rPr>
+              <a:t>Hütchen-Inventar → 6 Lebens-Bereiche → Notion</a:t>
+            </a:r>
+          </a:p>
+          <a:p>
+            <a:pPr>
+              <a:spcBef>
+                <a:spcPts val="0"/>
+              </a:spcBef>
+              <a:spcAft>
+                <a:spcPts val="900"/>
+              </a:spcAft>
+            </a:pPr>
+            <a:r>
+              <a:rPr sz="1600" b="0" i="0">
+                <a:solidFill>
+                  <a:srgbClr val="2C3E50"/>
+                </a:solidFill>
+                <a:latin typeface="Calibri"/>
+              </a:rPr>
+              <a:t>Wir erfinden nichts Neues.</a:t>
+            </a:r>
+          </a:p>
+          <a:p>
+            <a:pPr>
+              <a:spcBef>
+                <a:spcPts val="0"/>
+              </a:spcBef>
+              <a:spcAft>
+                <a:spcPts val="800"/>
+              </a:spcAft>
+            </a:pPr>
+            <a:r>
+              <a:rPr sz="1400" b="0" i="1">
+                <a:solidFill>
+                  <a:srgbClr val="7A8A95"/>
+                </a:solidFill>
+                <a:latin typeface="Calibri"/>
+              </a:rPr>
+              <a:t>Wir geben deinem Erarbeiteten nur ein ordentliches Zuhause.</a:t>
+            </a:r>
+          </a:p>
+        </p:txBody>
+      </p:sp>
+      <p:sp>
+        <p:nvSpPr>
+          <p:cNvPr id="4" name="TextBox 3"/>
+          <p:cNvSpPr txBox="1"/>
+          <p:nvPr/>
+        </p:nvSpPr>
+        <p:spPr>
+          <a:xfrm>
+            <a:off x="457200" y="4754880"/>
+            <a:ext cx="5486400" cy="274320"/>
+          </a:xfrm>
+          <a:prstGeom prst="rect">
+            <a:avLst/>
+          </a:prstGeom>
+          <a:noFill/>
+        </p:spPr>
+        <p:txBody>
+          <a:bodyPr wrap="square" anchor="t" lIns="0" rIns="0" tIns="0" bIns="0">
+            <a:spAutoFit/>
+          </a:bodyPr>
+          <a:lstStyle/>
+          <a:p>
+            <a:r>
+              <a:rPr sz="900" b="0" i="0">
+                <a:solidFill>
+                  <a:srgbClr val="7A8A95"/>
+                </a:solidFill>
+                <a:latin typeface="Calibri"/>
+              </a:rPr>
+              <a:t>Mama-CEO · Säule 3 · Lektion 3.1</a:t>
+            </a:r>
+          </a:p>
+        </p:txBody>
+      </p:sp>
+      <p:sp>
+        <p:nvSpPr>
+          <p:cNvPr id="5" name="TextBox 4"/>
+          <p:cNvSpPr txBox="1"/>
+          <p:nvPr/>
+        </p:nvSpPr>
+        <p:spPr>
+          <a:xfrm>
+            <a:off x="6400800" y="4754880"/>
+            <a:ext cx="2286000" cy="274320"/>
+          </a:xfrm>
+          <a:prstGeom prst="rect">
+            <a:avLst/>
+          </a:prstGeom>
+          <a:noFill/>
+        </p:spPr>
+        <p:txBody>
+          <a:bodyPr wrap="square" anchor="t" lIns="0" rIns="0" tIns="0" bIns="0">
+            <a:spAutoFit/>
+          </a:bodyPr>
+          <a:lstStyle/>
+          <a:p>
+            <a:pPr algn="r"/>
+            <a:r>
+              <a:rPr sz="900" b="0" i="0">
+                <a:solidFill>
+                  <a:srgbClr val="7A8A95"/>
+                </a:solidFill>
+                <a:latin typeface="Calibri"/>
+              </a:rPr>
+              <a:t>Mum Life Balance</a:t>
+            </a:r>
+          </a:p>
+        </p:txBody>
+      </p:sp>
+    </p:spTree>
+  </p:cSld>
+  <p:clrMapOvr>
+    <a:masterClrMapping/>
+  </p:clrMapOvr>
+</p:sld>
+</file>
+
+<file path=ppt/slides/slide8.xml><?xml version="1.0" encoding="utf-8"?>
+<p:sld xmlns:a="http://schemas.openxmlformats.org/drawingml/2006/main" xmlns:p="http://schemas.openxmlformats.org/presentationml/2006/main" xmlns:r="http://schemas.openxmlformats.org/officeDocument/2006/relationships">
+  <p:cSld>
+    <p:bg>
+      <p:bgPr>
+        <a:solidFill>
+          <a:srgbClr val="FFFFFF"/>
+        </a:solidFill>
+        <a:effectLst/>
+      </p:bgPr>
+    </p:bg>
+    <p:spTree>
+      <p:nvGrpSpPr>
+        <p:cNvPr id="1" name=""/>
+        <p:cNvGrpSpPr/>
+        <p:nvPr/>
+      </p:nvGrpSpPr>
+      <p:grpSpPr/>
+      <p:sp>
+        <p:nvSpPr>
+          <p:cNvPr id="2" name="TextBox 1"/>
+          <p:cNvSpPr txBox="1"/>
+          <p:nvPr/>
+        </p:nvSpPr>
+        <p:spPr>
+          <a:xfrm>
+            <a:off x="548640" y="457200"/>
+            <a:ext cx="8046720" cy="822960"/>
+          </a:xfrm>
+          <a:prstGeom prst="rect">
+            <a:avLst/>
+          </a:prstGeom>
+          <a:noFill/>
+        </p:spPr>
+        <p:txBody>
+          <a:bodyPr wrap="square" anchor="t" lIns="0" rIns="0" tIns="0" bIns="0">
+            <a:spAutoFit/>
+          </a:bodyPr>
+          <a:lstStyle/>
+          <a:p>
+            <a:r>
+              <a:rPr sz="3000" b="1" i="0">
+                <a:solidFill>
+                  <a:srgbClr val="1A3A4A"/>
+                </a:solidFill>
+                <a:latin typeface="Georgia"/>
+              </a:rPr>
+              <a:t>Dein nächster Schritt</a:t>
+            </a:r>
+          </a:p>
+        </p:txBody>
+      </p:sp>
+      <p:sp>
+        <p:nvSpPr>
+          <p:cNvPr id="3" name="Rectangle 2"/>
           <p:cNvSpPr/>
           <p:nvPr/>
         </p:nvSpPr>
         <p:spPr>
           <a:xfrm>
-            <a:off x="548640" y="502920"/>
-            <a:ext cx="201168" cy="201168"/>
+            <a:off x="548640" y="1737360"/>
+            <a:ext cx="3931920" cy="2743200"/>
           </a:xfrm>
           <a:prstGeom prst="rect">
             <a:avLst/>
           </a:prstGeom>
           <a:solidFill>
-            <a:srgbClr val="1F6F6B"/>
+            <a:srgbClr val="F1ECDD"/>
           </a:solidFill>
           <a:ln>
             <a:noFill/>
@@ -5304,14 +6130,58 @@
       </p:sp>
       <p:sp>
         <p:nvSpPr>
-          <p:cNvPr id="3" name="TextBox 2"/>
+          <p:cNvPr id="4" name="Rectangle 3"/>
+          <p:cNvSpPr/>
+          <p:nvPr/>
+        </p:nvSpPr>
+        <p:spPr>
+          <a:xfrm>
+            <a:off x="548640" y="1737360"/>
+            <a:ext cx="3931920" cy="91440"/>
+          </a:xfrm>
+          <a:prstGeom prst="rect">
+            <a:avLst/>
+          </a:prstGeom>
+          <a:solidFill>
+            <a:srgbClr val="12828C"/>
+          </a:solidFill>
+          <a:ln>
+            <a:noFill/>
+          </a:ln>
+          <a:effectLst/>
+        </p:spPr>
+        <p:style>
+          <a:lnRef idx="1">
+            <a:schemeClr val="accent1"/>
+          </a:lnRef>
+          <a:fillRef idx="3">
+            <a:schemeClr val="accent1"/>
+          </a:fillRef>
+          <a:effectRef idx="2">
+            <a:schemeClr val="accent1"/>
+          </a:effectRef>
+          <a:fontRef idx="minor">
+            <a:schemeClr val="lt1"/>
+          </a:fontRef>
+        </p:style>
+        <p:txBody>
+          <a:bodyPr rtlCol="0" anchor="ctr"/>
+          <a:lstStyle/>
+          <a:p>
+            <a:pPr algn="ctr"/>
+          </a:p>
+        </p:txBody>
+      </p:sp>
+      <p:sp>
+        <p:nvSpPr>
+          <p:cNvPr id="5" name="TextBox 4"/>
           <p:cNvSpPr txBox="1"/>
           <p:nvPr/>
         </p:nvSpPr>
         <p:spPr>
           <a:xfrm>
-            <a:off x="868680" y="457200"/>
-            <a:ext cx="10424160" cy="1005840"/>
+            <a:off x="731520" y="1920240"/>
+            <a:ext cx="3657600" cy="274320"/>
           </a:xfrm>
           <a:prstGeom prst="rect">
             <a:avLst/>
@@ -5324,36 +6194,28 @@
           </a:bodyPr>
           <a:lstStyle/>
           <a:p>
-            <a:pPr algn="l">
-              <a:spcBef>
-                <a:spcPts val="0"/>
-              </a:spcBef>
-              <a:spcAft>
-                <a:spcPts val="1000"/>
-              </a:spcAft>
-            </a:pPr>
-            <a:r>
-              <a:rPr sz="3200" b="1" i="0">
-                <a:solidFill>
-                  <a:srgbClr val="1F6F6B"/>
-                </a:solidFill>
-                <a:latin typeface="Georgia"/>
-              </a:rPr>
-              <a:t>Dein Brain Dump wandert ins System</a:t>
-            </a:r>
-          </a:p>
-        </p:txBody>
-      </p:sp>
-      <p:sp>
-        <p:nvSpPr>
-          <p:cNvPr id="4" name="TextBox 3"/>
+            <a:r>
+              <a:rPr sz="1000" b="1" i="0">
+                <a:solidFill>
+                  <a:srgbClr val="0D6168"/>
+                </a:solidFill>
+                <a:latin typeface="Calibri"/>
+              </a:rPr>
+              <a:t>📋  ARBEITSBLATT</a:t>
+            </a:r>
+          </a:p>
+        </p:txBody>
+      </p:sp>
+      <p:sp>
+        <p:nvSpPr>
+          <p:cNvPr id="6" name="TextBox 5"/>
           <p:cNvSpPr txBox="1"/>
           <p:nvPr/>
         </p:nvSpPr>
         <p:spPr>
           <a:xfrm>
-            <a:off x="868680" y="1783080"/>
-            <a:ext cx="10424160" cy="4572000"/>
+            <a:off x="731520" y="2286000"/>
+            <a:ext cx="3657600" cy="548640"/>
           </a:xfrm>
           <a:prstGeom prst="rect">
             <a:avLst/>
@@ -5366,100 +6228,28 @@
           </a:bodyPr>
           <a:lstStyle/>
           <a:p>
-            <a:pPr algn="l">
-              <a:spcBef>
-                <a:spcPts val="0"/>
-              </a:spcBef>
-              <a:spcAft>
-                <a:spcPts val="1400"/>
-              </a:spcAft>
-            </a:pPr>
-            <a:r>
-              <a:rPr sz="2600" b="1" i="0">
-                <a:solidFill>
-                  <a:srgbClr val="2A2A2A"/>
+            <a:r>
+              <a:rPr sz="1600" b="1" i="0">
+                <a:solidFill>
+                  <a:srgbClr val="1A3A4A"/>
                 </a:solidFill>
                 <a:latin typeface="Georgia"/>
               </a:rPr>
-              <a:t>Hütchen-Inventar (S2)  →  6 Lebens-Bereiche  →  Notion</a:t>
-            </a:r>
-          </a:p>
-          <a:p>
-            <a:pPr algn="l">
-              <a:spcBef>
-                <a:spcPts val="0"/>
-              </a:spcBef>
-              <a:spcAft>
-                <a:spcPts val="1400"/>
-              </a:spcAft>
-            </a:pPr>
-            <a:r>
-              <a:rPr sz="2100" b="0" i="0">
-                <a:solidFill>
-                  <a:srgbClr val="2A2A2A"/>
-                </a:solidFill>
-                <a:latin typeface="Calibri"/>
-              </a:rPr>
-              <a:t>Wir erfinden nichts Neues.</a:t>
-            </a:r>
-          </a:p>
-          <a:p>
-            <a:pPr algn="l">
-              <a:spcBef>
-                <a:spcPts val="0"/>
-              </a:spcBef>
-              <a:spcAft>
-                <a:spcPts val="1400"/>
-              </a:spcAft>
-            </a:pPr>
-            <a:r>
-              <a:rPr sz="2000" b="0" i="1">
-                <a:solidFill>
-                  <a:srgbClr val="6E6E6E"/>
-                </a:solidFill>
-                <a:latin typeface="Calibri"/>
-              </a:rPr>
-              <a:t>Wir geben deinem Erarbeiteten nur ein ordentliches Zuhause.</a:t>
-            </a:r>
-          </a:p>
-        </p:txBody>
-      </p:sp>
-    </p:spTree>
-  </p:cSld>
-  <p:clrMapOvr>
-    <a:masterClrMapping/>
-  </p:clrMapOvr>
-</p:sld>
-</file>
-
-<file path=ppt/slides/slide8.xml><?xml version="1.0" encoding="utf-8"?>
-<p:sld xmlns:a="http://schemas.openxmlformats.org/drawingml/2006/main" xmlns:p="http://schemas.openxmlformats.org/presentationml/2006/main" xmlns:r="http://schemas.openxmlformats.org/officeDocument/2006/relationships">
-  <p:cSld>
-    <p:bg>
-      <p:bgPr>
-        <a:solidFill>
-          <a:srgbClr val="1F6F6B"/>
-        </a:solidFill>
-        <a:effectLst/>
-      </p:bgPr>
-    </p:bg>
-    <p:spTree>
-      <p:nvGrpSpPr>
-        <p:cNvPr id="1" name=""/>
-        <p:cNvGrpSpPr/>
-        <p:nvPr/>
-      </p:nvGrpSpPr>
-      <p:grpSpPr/>
-      <p:sp>
-        <p:nvSpPr>
-          <p:cNvPr id="2" name="TextBox 1"/>
+              <a:t>Brain Dump sortieren</a:t>
+            </a:r>
+          </a:p>
+        </p:txBody>
+      </p:sp>
+      <p:sp>
+        <p:nvSpPr>
+          <p:cNvPr id="7" name="TextBox 6"/>
           <p:cNvSpPr txBox="1"/>
           <p:nvPr/>
         </p:nvSpPr>
         <p:spPr>
           <a:xfrm>
-            <a:off x="1005840" y="2194560"/>
-            <a:ext cx="10149840" cy="2743200"/>
+            <a:off x="731520" y="2880360"/>
+            <a:ext cx="3566160" cy="1463040"/>
           </a:xfrm>
           <a:prstGeom prst="rect">
             <a:avLst/>
@@ -5467,65 +6257,278 @@
           <a:noFill/>
         </p:spPr>
         <p:txBody>
-          <a:bodyPr wrap="square" anchor="ctr" lIns="0" rIns="0" tIns="0" bIns="0">
+          <a:bodyPr wrap="square" anchor="t" lIns="0" rIns="0" tIns="0" bIns="0">
             <a:spAutoFit/>
           </a:bodyPr>
           <a:lstStyle/>
           <a:p>
-            <a:pPr algn="l">
-              <a:spcBef>
-                <a:spcPts val="0"/>
-              </a:spcBef>
-              <a:spcAft>
-                <a:spcPts val="1800"/>
-              </a:spcAft>
-            </a:pPr>
-            <a:r>
-              <a:rPr sz="2200" b="0" i="0">
-                <a:solidFill>
-                  <a:srgbClr val="F1ECDD"/>
+            <a:r>
+              <a:rPr sz="1250" b="0" i="0">
+                <a:solidFill>
+                  <a:srgbClr val="2C3E50"/>
                 </a:solidFill>
                 <a:latin typeface="Calibri"/>
               </a:rPr>
-              <a:t>📋 Im Arbeitsblatt</a:t>
-            </a:r>
-          </a:p>
-          <a:p>
-            <a:pPr algn="l">
-              <a:spcBef>
-                <a:spcPts val="0"/>
-              </a:spcBef>
-              <a:spcAft>
-                <a:spcPts val="1800"/>
-              </a:spcAft>
-            </a:pPr>
-            <a:r>
-              <a:rPr sz="3200" b="1" i="0">
-                <a:solidFill>
-                  <a:srgbClr val="FFFFFF"/>
+              <a:t>Sortier deinen Brain Dump aus Säule 2 in die 6 Lebens-Bereiche — einfach als ersten Wurf.</a:t>
+            </a:r>
+          </a:p>
+        </p:txBody>
+      </p:sp>
+      <p:sp>
+        <p:nvSpPr>
+          <p:cNvPr id="8" name="Rectangle 7"/>
+          <p:cNvSpPr/>
+          <p:nvPr/>
+        </p:nvSpPr>
+        <p:spPr>
+          <a:xfrm>
+            <a:off x="4663440" y="1737360"/>
+            <a:ext cx="3931920" cy="2743200"/>
+          </a:xfrm>
+          <a:prstGeom prst="rect">
+            <a:avLst/>
+          </a:prstGeom>
+          <a:solidFill>
+            <a:srgbClr val="F1ECDD"/>
+          </a:solidFill>
+          <a:ln>
+            <a:noFill/>
+          </a:ln>
+          <a:effectLst/>
+        </p:spPr>
+        <p:style>
+          <a:lnRef idx="1">
+            <a:schemeClr val="accent1"/>
+          </a:lnRef>
+          <a:fillRef idx="3">
+            <a:schemeClr val="accent1"/>
+          </a:fillRef>
+          <a:effectRef idx="2">
+            <a:schemeClr val="accent1"/>
+          </a:effectRef>
+          <a:fontRef idx="minor">
+            <a:schemeClr val="lt1"/>
+          </a:fontRef>
+        </p:style>
+        <p:txBody>
+          <a:bodyPr rtlCol="0" anchor="ctr"/>
+          <a:lstStyle/>
+          <a:p>
+            <a:pPr algn="ctr"/>
+          </a:p>
+        </p:txBody>
+      </p:sp>
+      <p:sp>
+        <p:nvSpPr>
+          <p:cNvPr id="9" name="Rectangle 8"/>
+          <p:cNvSpPr/>
+          <p:nvPr/>
+        </p:nvSpPr>
+        <p:spPr>
+          <a:xfrm>
+            <a:off x="4663440" y="1737360"/>
+            <a:ext cx="3931920" cy="91440"/>
+          </a:xfrm>
+          <a:prstGeom prst="rect">
+            <a:avLst/>
+          </a:prstGeom>
+          <a:solidFill>
+            <a:srgbClr val="DC822E"/>
+          </a:solidFill>
+          <a:ln>
+            <a:noFill/>
+          </a:ln>
+          <a:effectLst/>
+        </p:spPr>
+        <p:style>
+          <a:lnRef idx="1">
+            <a:schemeClr val="accent1"/>
+          </a:lnRef>
+          <a:fillRef idx="3">
+            <a:schemeClr val="accent1"/>
+          </a:fillRef>
+          <a:effectRef idx="2">
+            <a:schemeClr val="accent1"/>
+          </a:effectRef>
+          <a:fontRef idx="minor">
+            <a:schemeClr val="lt1"/>
+          </a:fontRef>
+        </p:style>
+        <p:txBody>
+          <a:bodyPr rtlCol="0" anchor="ctr"/>
+          <a:lstStyle/>
+          <a:p>
+            <a:pPr algn="ctr"/>
+          </a:p>
+        </p:txBody>
+      </p:sp>
+      <p:sp>
+        <p:nvSpPr>
+          <p:cNvPr id="10" name="TextBox 9"/>
+          <p:cNvSpPr txBox="1"/>
+          <p:nvPr/>
+        </p:nvSpPr>
+        <p:spPr>
+          <a:xfrm>
+            <a:off x="4846320" y="1920240"/>
+            <a:ext cx="3657600" cy="274320"/>
+          </a:xfrm>
+          <a:prstGeom prst="rect">
+            <a:avLst/>
+          </a:prstGeom>
+          <a:noFill/>
+        </p:spPr>
+        <p:txBody>
+          <a:bodyPr wrap="square" anchor="t" lIns="0" rIns="0" tIns="0" bIns="0">
+            <a:spAutoFit/>
+          </a:bodyPr>
+          <a:lstStyle/>
+          <a:p>
+            <a:r>
+              <a:rPr sz="1000" b="1" i="0">
+                <a:solidFill>
+                  <a:srgbClr val="DC822E"/>
+                </a:solidFill>
+                <a:latin typeface="Calibri"/>
+              </a:rPr>
+              <a:t>▶  ALS NÄCHSTES</a:t>
+            </a:r>
+          </a:p>
+        </p:txBody>
+      </p:sp>
+      <p:sp>
+        <p:nvSpPr>
+          <p:cNvPr id="11" name="TextBox 10"/>
+          <p:cNvSpPr txBox="1"/>
+          <p:nvPr/>
+        </p:nvSpPr>
+        <p:spPr>
+          <a:xfrm>
+            <a:off x="4846320" y="2286000"/>
+            <a:ext cx="3657600" cy="548640"/>
+          </a:xfrm>
+          <a:prstGeom prst="rect">
+            <a:avLst/>
+          </a:prstGeom>
+          <a:noFill/>
+        </p:spPr>
+        <p:txBody>
+          <a:bodyPr wrap="square" anchor="t" lIns="0" rIns="0" tIns="0" bIns="0">
+            <a:spAutoFit/>
+          </a:bodyPr>
+          <a:lstStyle/>
+          <a:p>
+            <a:r>
+              <a:rPr sz="1600" b="1" i="0">
+                <a:solidFill>
+                  <a:srgbClr val="1A3A4A"/>
                 </a:solidFill>
                 <a:latin typeface="Georgia"/>
               </a:rPr>
-              <a:t>Sortier deinen Brain Dump in die 6 Lebens-Bereiche</a:t>
-            </a:r>
-          </a:p>
-          <a:p>
-            <a:pPr algn="l">
-              <a:spcBef>
-                <a:spcPts val="0"/>
-              </a:spcBef>
-              <a:spcAft>
-                <a:spcPts val="1800"/>
-              </a:spcAft>
-            </a:pPr>
-            <a:r>
-              <a:rPr sz="2200" b="0" i="0">
-                <a:solidFill>
-                  <a:srgbClr val="F1ECDD"/>
+              <a:t>Lektion 3.2</a:t>
+            </a:r>
+          </a:p>
+        </p:txBody>
+      </p:sp>
+      <p:sp>
+        <p:nvSpPr>
+          <p:cNvPr id="12" name="TextBox 11"/>
+          <p:cNvSpPr txBox="1"/>
+          <p:nvPr/>
+        </p:nvSpPr>
+        <p:spPr>
+          <a:xfrm>
+            <a:off x="4846320" y="2880360"/>
+            <a:ext cx="3566160" cy="1463040"/>
+          </a:xfrm>
+          <a:prstGeom prst="rect">
+            <a:avLst/>
+          </a:prstGeom>
+          <a:noFill/>
+        </p:spPr>
+        <p:txBody>
+          <a:bodyPr wrap="square" anchor="t" lIns="0" rIns="0" tIns="0" bIns="0">
+            <a:spAutoFit/>
+          </a:bodyPr>
+          <a:lstStyle/>
+          <a:p>
+            <a:r>
+              <a:rPr sz="1250" b="0" i="0">
+                <a:solidFill>
+                  <a:srgbClr val="2C3E50"/>
                 </a:solidFill>
                 <a:latin typeface="Calibri"/>
               </a:rPr>
-              <a:t>Nächste Lektion: 3.2 — Notion als Business-Brain</a:t>
+              <a:t>Notion als Business-Brain — du siehst, wo das alles am Ende lebt.</a:t>
+            </a:r>
+          </a:p>
+        </p:txBody>
+      </p:sp>
+      <p:sp>
+        <p:nvSpPr>
+          <p:cNvPr id="13" name="TextBox 12"/>
+          <p:cNvSpPr txBox="1"/>
+          <p:nvPr/>
+        </p:nvSpPr>
+        <p:spPr>
+          <a:xfrm>
+            <a:off x="457200" y="4754880"/>
+            <a:ext cx="5486400" cy="274320"/>
+          </a:xfrm>
+          <a:prstGeom prst="rect">
+            <a:avLst/>
+          </a:prstGeom>
+          <a:noFill/>
+        </p:spPr>
+        <p:txBody>
+          <a:bodyPr wrap="square" anchor="t" lIns="0" rIns="0" tIns="0" bIns="0">
+            <a:spAutoFit/>
+          </a:bodyPr>
+          <a:lstStyle/>
+          <a:p>
+            <a:r>
+              <a:rPr sz="900" b="0" i="0">
+                <a:solidFill>
+                  <a:srgbClr val="7A8A95"/>
+                </a:solidFill>
+                <a:latin typeface="Calibri"/>
+              </a:rPr>
+              <a:t>Mama-CEO · Säule 3 · Lektion 3.1</a:t>
+            </a:r>
+          </a:p>
+        </p:txBody>
+      </p:sp>
+      <p:sp>
+        <p:nvSpPr>
+          <p:cNvPr id="14" name="TextBox 13"/>
+          <p:cNvSpPr txBox="1"/>
+          <p:nvPr/>
+        </p:nvSpPr>
+        <p:spPr>
+          <a:xfrm>
+            <a:off x="6400800" y="4754880"/>
+            <a:ext cx="2286000" cy="274320"/>
+          </a:xfrm>
+          <a:prstGeom prst="rect">
+            <a:avLst/>
+          </a:prstGeom>
+          <a:noFill/>
+        </p:spPr>
+        <p:txBody>
+          <a:bodyPr wrap="square" anchor="t" lIns="0" rIns="0" tIns="0" bIns="0">
+            <a:spAutoFit/>
+          </a:bodyPr>
+          <a:lstStyle/>
+          <a:p>
+            <a:pPr algn="r"/>
+            <a:r>
+              <a:rPr sz="900" b="0" i="0">
+                <a:solidFill>
+                  <a:srgbClr val="7A8A95"/>
+                </a:solidFill>
+                <a:latin typeface="Calibri"/>
+              </a:rPr>
+              <a:t>Mum Life Balance</a:t>
             </a:r>
           </a:p>
         </p:txBody>
